--- a/docs/universal-gap-framework-combined.pptx
+++ b/docs/universal-gap-framework-combined.pptx
@@ -8,6 +8,7 @@
     <p:notesMasterId r:id="rId8"/>
   </p:notesMasterIdLst>
   <p:sldIdLst>
+    <p:sldId id="324" r:id="rId16"/>
     <p:sldId id="256" r:id="rId2"/>
     <p:sldId id="257" r:id="rId3"/>
     <p:sldId id="258" r:id="rId4"/>
@@ -39184,6 +39185,2973 @@
                 <a:latin typeface="Trenda IG Text"/>
               </a:rPr>
               <a:t>The framework is open by construction. Every vendor named here is an example, not a dependency.</a:t>
+            </a:r>
+          </a:p>
+        </p:txBody>
+      </p:sp>
+    </p:spTree>
+  </p:cSld>
+  <p:clrMapOvr>
+    <a:masterClrMapping/>
+  </p:clrMapOvr>
+</p:sld>
+</file>
+
+<file path=ppt/slides/slide8.xml><?xml version="1.0" encoding="utf-8"?>
+<p:sld xmlns:a="http://schemas.openxmlformats.org/drawingml/2006/main" xmlns:p="http://schemas.openxmlformats.org/presentationml/2006/main" xmlns:r="http://schemas.openxmlformats.org/officeDocument/2006/relationships">
+  <p:cSld>
+    <p:spTree>
+      <p:nvGrpSpPr>
+        <p:cNvPr id="1" name=""/>
+        <p:cNvGrpSpPr/>
+        <p:nvPr/>
+      </p:nvGrpSpPr>
+      <p:grpSpPr/>
+      <p:sp>
+        <p:nvSpPr>
+          <p:cNvPr id="2" name="Rectangle 1"/>
+          <p:cNvSpPr/>
+          <p:nvPr/>
+        </p:nvSpPr>
+        <p:spPr>
+          <a:xfrm>
+            <a:off x="0" y="0"/>
+            <a:ext cx="12192000" cy="6858000"/>
+          </a:xfrm>
+          <a:prstGeom prst="rect">
+            <a:avLst/>
+          </a:prstGeom>
+          <a:solidFill>
+            <a:srgbClr val="FFFFFF"/>
+          </a:solidFill>
+          <a:ln>
+            <a:noFill/>
+          </a:ln>
+          <a:effectLst/>
+        </p:spPr>
+        <p:style>
+          <a:lnRef idx="1">
+            <a:schemeClr val="accent1"/>
+          </a:lnRef>
+          <a:fillRef idx="3">
+            <a:schemeClr val="accent1"/>
+          </a:fillRef>
+          <a:effectRef idx="2">
+            <a:schemeClr val="accent1"/>
+          </a:effectRef>
+          <a:fontRef idx="minor">
+            <a:schemeClr val="lt1"/>
+          </a:fontRef>
+        </p:style>
+        <p:txBody>
+          <a:bodyPr rtlCol="0" anchor="ctr"/>
+          <a:lstStyle/>
+          <a:p/>
+        </p:txBody>
+      </p:sp>
+      <p:sp>
+        <p:nvSpPr>
+          <p:cNvPr id="3" name="Rectangle 2"/>
+          <p:cNvSpPr/>
+          <p:nvPr/>
+        </p:nvSpPr>
+        <p:spPr>
+          <a:xfrm>
+            <a:off x="0" y="0"/>
+            <a:ext cx="12192000" cy="868680"/>
+          </a:xfrm>
+          <a:prstGeom prst="rect">
+            <a:avLst/>
+          </a:prstGeom>
+          <a:solidFill>
+            <a:srgbClr val="0E1B2E"/>
+          </a:solidFill>
+          <a:ln>
+            <a:noFill/>
+          </a:ln>
+          <a:effectLst/>
+        </p:spPr>
+        <p:style>
+          <a:lnRef idx="1">
+            <a:schemeClr val="accent1"/>
+          </a:lnRef>
+          <a:fillRef idx="3">
+            <a:schemeClr val="accent1"/>
+          </a:fillRef>
+          <a:effectRef idx="2">
+            <a:schemeClr val="accent1"/>
+          </a:effectRef>
+          <a:fontRef idx="minor">
+            <a:schemeClr val="lt1"/>
+          </a:fontRef>
+        </p:style>
+        <p:txBody>
+          <a:bodyPr rtlCol="0" anchor="ctr"/>
+          <a:lstStyle/>
+          <a:p/>
+        </p:txBody>
+      </p:sp>
+      <p:sp>
+        <p:nvSpPr>
+          <p:cNvPr id="4" name="TextBox 3"/>
+          <p:cNvSpPr txBox="1"/>
+          <p:nvPr/>
+        </p:nvSpPr>
+        <p:spPr>
+          <a:xfrm>
+            <a:off x="457200" y="137160"/>
+            <a:ext cx="8229600" cy="219456"/>
+          </a:xfrm>
+          <a:prstGeom prst="rect">
+            <a:avLst/>
+          </a:prstGeom>
+          <a:noFill/>
+        </p:spPr>
+        <p:txBody>
+          <a:bodyPr wrap="square" lIns="0" rIns="0" tIns="0" bIns="0" anchor="t">
+            <a:spAutoFit/>
+          </a:bodyPr>
+          <a:lstStyle/>
+          <a:p>
+            <a:r>
+              <a:rPr sz="1050" spc="120">
+                <a:solidFill>
+                  <a:srgbClr val="5FD0C0"/>
+                </a:solidFill>
+                <a:latin typeface="Trenda IG Display Semibold"/>
+              </a:rPr>
+              <a:t>THE UNIVERSAL PROBLEM</a:t>
+            </a:r>
+          </a:p>
+        </p:txBody>
+      </p:sp>
+      <p:sp>
+        <p:nvSpPr>
+          <p:cNvPr id="5" name="TextBox 4"/>
+          <p:cNvSpPr txBox="1"/>
+          <p:nvPr/>
+        </p:nvSpPr>
+        <p:spPr>
+          <a:xfrm>
+            <a:off x="457200" y="365760"/>
+            <a:ext cx="10058400" cy="384048"/>
+          </a:xfrm>
+          <a:prstGeom prst="rect">
+            <a:avLst/>
+          </a:prstGeom>
+          <a:noFill/>
+        </p:spPr>
+        <p:txBody>
+          <a:bodyPr wrap="square" lIns="0" rIns="0" tIns="0" bIns="0" anchor="t">
+            <a:spAutoFit/>
+          </a:bodyPr>
+          <a:lstStyle/>
+          <a:p>
+            <a:r>
+              <a:rPr sz="2200">
+                <a:solidFill>
+                  <a:srgbClr val="FFFFFF"/>
+                </a:solidFill>
+                <a:latin typeface="Trenda IG Display Bold"/>
+              </a:rPr>
+              <a:t>Every business can count what it has. Almost none can see what is missing.</a:t>
+            </a:r>
+          </a:p>
+        </p:txBody>
+      </p:sp>
+      <p:sp>
+        <p:nvSpPr>
+          <p:cNvPr id="6" name="TextBox 5"/>
+          <p:cNvSpPr txBox="1"/>
+          <p:nvPr/>
+        </p:nvSpPr>
+        <p:spPr>
+          <a:xfrm>
+            <a:off x="10698480" y="219456"/>
+            <a:ext cx="1371600" cy="457200"/>
+          </a:xfrm>
+          <a:prstGeom prst="rect">
+            <a:avLst/>
+          </a:prstGeom>
+          <a:noFill/>
+        </p:spPr>
+        <p:txBody>
+          <a:bodyPr wrap="square" lIns="0" rIns="0" tIns="0" bIns="0" anchor="t">
+            <a:spAutoFit/>
+          </a:bodyPr>
+          <a:lstStyle/>
+          <a:p>
+            <a:pPr>
+              <a:lnSpc>
+                <a:spcPct val="108000"/>
+              </a:lnSpc>
+            </a:pPr>
+            <a:r>
+              <a:rPr sz="900">
+                <a:solidFill>
+                  <a:srgbClr val="A9B4C2"/>
+                </a:solidFill>
+                <a:latin typeface="Trenda IG Text Light"/>
+              </a:rPr>
+              <a:t>True in every industry</a:t>
+            </a:r>
+          </a:p>
+          <a:p>
+            <a:pPr>
+              <a:lnSpc>
+                <a:spcPct val="108000"/>
+              </a:lnSpc>
+            </a:pPr>
+            <a:r>
+              <a:rPr sz="900">
+                <a:solidFill>
+                  <a:srgbClr val="A9B4C2"/>
+                </a:solidFill>
+                <a:latin typeface="Trenda IG Text Light"/>
+              </a:rPr>
+              <a:t>we have looked at.</a:t>
+            </a:r>
+          </a:p>
+        </p:txBody>
+      </p:sp>
+      <p:sp>
+        <p:nvSpPr>
+          <p:cNvPr id="7" name="Rectangle 6"/>
+          <p:cNvSpPr/>
+          <p:nvPr/>
+        </p:nvSpPr>
+        <p:spPr>
+          <a:xfrm>
+            <a:off x="109728" y="987552"/>
+            <a:ext cx="3904487" cy="4572000"/>
+          </a:xfrm>
+          <a:prstGeom prst="rect">
+            <a:avLst/>
+          </a:prstGeom>
+          <a:solidFill>
+            <a:srgbClr val="F4F6F9"/>
+          </a:solidFill>
+          <a:ln w="9525">
+            <a:solidFill>
+              <a:srgbClr val="D5D9DE"/>
+            </a:solidFill>
+          </a:ln>
+          <a:effectLst/>
+        </p:spPr>
+        <p:style>
+          <a:lnRef idx="1">
+            <a:schemeClr val="accent1"/>
+          </a:lnRef>
+          <a:fillRef idx="3">
+            <a:schemeClr val="accent1"/>
+          </a:fillRef>
+          <a:effectRef idx="2">
+            <a:schemeClr val="accent1"/>
+          </a:effectRef>
+          <a:fontRef idx="minor">
+            <a:schemeClr val="lt1"/>
+          </a:fontRef>
+        </p:style>
+        <p:txBody>
+          <a:bodyPr rtlCol="0" anchor="ctr"/>
+          <a:lstStyle/>
+          <a:p/>
+        </p:txBody>
+      </p:sp>
+      <p:sp>
+        <p:nvSpPr>
+          <p:cNvPr id="8" name="Rectangle 7"/>
+          <p:cNvSpPr/>
+          <p:nvPr/>
+        </p:nvSpPr>
+        <p:spPr>
+          <a:xfrm>
+            <a:off x="292608" y="1197864"/>
+            <a:ext cx="91440" cy="91440"/>
+          </a:xfrm>
+          <a:prstGeom prst="rect">
+            <a:avLst/>
+          </a:prstGeom>
+          <a:solidFill>
+            <a:srgbClr val="C62828"/>
+          </a:solidFill>
+          <a:ln>
+            <a:noFill/>
+          </a:ln>
+          <a:effectLst/>
+        </p:spPr>
+        <p:style>
+          <a:lnRef idx="1">
+            <a:schemeClr val="accent1"/>
+          </a:lnRef>
+          <a:fillRef idx="3">
+            <a:schemeClr val="accent1"/>
+          </a:fillRef>
+          <a:effectRef idx="2">
+            <a:schemeClr val="accent1"/>
+          </a:effectRef>
+          <a:fontRef idx="minor">
+            <a:schemeClr val="lt1"/>
+          </a:fontRef>
+        </p:style>
+        <p:txBody>
+          <a:bodyPr rtlCol="0" anchor="ctr"/>
+          <a:lstStyle/>
+          <a:p/>
+        </p:txBody>
+      </p:sp>
+      <p:sp>
+        <p:nvSpPr>
+          <p:cNvPr id="9" name="TextBox 8"/>
+          <p:cNvSpPr txBox="1"/>
+          <p:nvPr/>
+        </p:nvSpPr>
+        <p:spPr>
+          <a:xfrm>
+            <a:off x="475488" y="1115568"/>
+            <a:ext cx="3355847" cy="274320"/>
+          </a:xfrm>
+          <a:prstGeom prst="rect">
+            <a:avLst/>
+          </a:prstGeom>
+          <a:noFill/>
+        </p:spPr>
+        <p:txBody>
+          <a:bodyPr wrap="square" lIns="0" rIns="0" tIns="0" bIns="0" anchor="t">
+            <a:spAutoFit/>
+          </a:bodyPr>
+          <a:lstStyle/>
+          <a:p>
+            <a:r>
+              <a:rPr sz="1400">
+                <a:solidFill>
+                  <a:srgbClr val="1A1A1A"/>
+                </a:solidFill>
+                <a:latin typeface="Trenda IG Display Bold"/>
+              </a:rPr>
+              <a:t>Why the gap stays invisible</a:t>
+            </a:r>
+          </a:p>
+        </p:txBody>
+      </p:sp>
+      <p:sp>
+        <p:nvSpPr>
+          <p:cNvPr id="10" name="Rectangle 9"/>
+          <p:cNvSpPr/>
+          <p:nvPr/>
+        </p:nvSpPr>
+        <p:spPr>
+          <a:xfrm>
+            <a:off x="329184" y="1536192"/>
+            <a:ext cx="1325880" cy="420624"/>
+          </a:xfrm>
+          <a:prstGeom prst="rect">
+            <a:avLst/>
+          </a:prstGeom>
+          <a:solidFill>
+            <a:srgbClr val="FFFFFF"/>
+          </a:solidFill>
+          <a:ln w="9525">
+            <a:solidFill>
+              <a:srgbClr val="D5D9DE"/>
+            </a:solidFill>
+          </a:ln>
+          <a:effectLst/>
+        </p:spPr>
+        <p:style>
+          <a:lnRef idx="1">
+            <a:schemeClr val="accent1"/>
+          </a:lnRef>
+          <a:fillRef idx="3">
+            <a:schemeClr val="accent1"/>
+          </a:fillRef>
+          <a:effectRef idx="2">
+            <a:schemeClr val="accent1"/>
+          </a:effectRef>
+          <a:fontRef idx="minor">
+            <a:schemeClr val="lt1"/>
+          </a:fontRef>
+        </p:style>
+        <p:txBody>
+          <a:bodyPr rtlCol="0" anchor="ctr"/>
+          <a:lstStyle/>
+          <a:p/>
+        </p:txBody>
+      </p:sp>
+      <p:sp>
+        <p:nvSpPr>
+          <p:cNvPr id="11" name="TextBox 10"/>
+          <p:cNvSpPr txBox="1"/>
+          <p:nvPr/>
+        </p:nvSpPr>
+        <p:spPr>
+          <a:xfrm>
+            <a:off x="329184" y="1536192"/>
+            <a:ext cx="1325880" cy="420624"/>
+          </a:xfrm>
+          <a:prstGeom prst="rect">
+            <a:avLst/>
+          </a:prstGeom>
+          <a:noFill/>
+        </p:spPr>
+        <p:txBody>
+          <a:bodyPr wrap="square" lIns="0" rIns="0" tIns="0" bIns="0" anchor="ctr">
+            <a:spAutoFit/>
+          </a:bodyPr>
+          <a:lstStyle/>
+          <a:p>
+            <a:pPr algn="ctr"/>
+            <a:r>
+              <a:rPr sz="900">
+                <a:solidFill>
+                  <a:srgbClr val="1A1A1A"/>
+                </a:solidFill>
+                <a:latin typeface="Trenda IG Text Semibold"/>
+              </a:rPr>
+              <a:t>DEMAND</a:t>
+            </a:r>
+          </a:p>
+        </p:txBody>
+      </p:sp>
+      <p:sp>
+        <p:nvSpPr>
+          <p:cNvPr id="12" name="Rectangle 11"/>
+          <p:cNvSpPr/>
+          <p:nvPr/>
+        </p:nvSpPr>
+        <p:spPr>
+          <a:xfrm>
+            <a:off x="2468880" y="1536192"/>
+            <a:ext cx="1325880" cy="420624"/>
+          </a:xfrm>
+          <a:prstGeom prst="rect">
+            <a:avLst/>
+          </a:prstGeom>
+          <a:solidFill>
+            <a:srgbClr val="FFFFFF"/>
+          </a:solidFill>
+          <a:ln w="9525">
+            <a:solidFill>
+              <a:srgbClr val="D5D9DE"/>
+            </a:solidFill>
+          </a:ln>
+          <a:effectLst/>
+        </p:spPr>
+        <p:style>
+          <a:lnRef idx="1">
+            <a:schemeClr val="accent1"/>
+          </a:lnRef>
+          <a:fillRef idx="3">
+            <a:schemeClr val="accent1"/>
+          </a:fillRef>
+          <a:effectRef idx="2">
+            <a:schemeClr val="accent1"/>
+          </a:effectRef>
+          <a:fontRef idx="minor">
+            <a:schemeClr val="lt1"/>
+          </a:fontRef>
+        </p:style>
+        <p:txBody>
+          <a:bodyPr rtlCol="0" anchor="ctr"/>
+          <a:lstStyle/>
+          <a:p/>
+        </p:txBody>
+      </p:sp>
+      <p:sp>
+        <p:nvSpPr>
+          <p:cNvPr id="13" name="TextBox 12"/>
+          <p:cNvSpPr txBox="1"/>
+          <p:nvPr/>
+        </p:nvSpPr>
+        <p:spPr>
+          <a:xfrm>
+            <a:off x="2468880" y="1536192"/>
+            <a:ext cx="1325880" cy="420624"/>
+          </a:xfrm>
+          <a:prstGeom prst="rect">
+            <a:avLst/>
+          </a:prstGeom>
+          <a:noFill/>
+        </p:spPr>
+        <p:txBody>
+          <a:bodyPr wrap="square" lIns="0" rIns="0" tIns="0" bIns="0" anchor="ctr">
+            <a:spAutoFit/>
+          </a:bodyPr>
+          <a:lstStyle/>
+          <a:p>
+            <a:pPr algn="ctr"/>
+            <a:r>
+              <a:rPr sz="900">
+                <a:solidFill>
+                  <a:srgbClr val="1A1A1A"/>
+                </a:solidFill>
+                <a:latin typeface="Trenda IG Text Semibold"/>
+              </a:rPr>
+              <a:t>SUPPLY</a:t>
+            </a:r>
+          </a:p>
+        </p:txBody>
+      </p:sp>
+      <p:sp>
+        <p:nvSpPr>
+          <p:cNvPr id="14" name="Rectangle 13"/>
+          <p:cNvSpPr/>
+          <p:nvPr/>
+        </p:nvSpPr>
+        <p:spPr>
+          <a:xfrm>
+            <a:off x="1719072" y="1709928"/>
+            <a:ext cx="64008" cy="64008"/>
+          </a:xfrm>
+          <a:prstGeom prst="rect">
+            <a:avLst/>
+          </a:prstGeom>
+          <a:solidFill>
+            <a:srgbClr val="C62828"/>
+          </a:solidFill>
+          <a:ln>
+            <a:noFill/>
+          </a:ln>
+          <a:effectLst/>
+        </p:spPr>
+        <p:style>
+          <a:lnRef idx="1">
+            <a:schemeClr val="accent1"/>
+          </a:lnRef>
+          <a:fillRef idx="3">
+            <a:schemeClr val="accent1"/>
+          </a:fillRef>
+          <a:effectRef idx="2">
+            <a:schemeClr val="accent1"/>
+          </a:effectRef>
+          <a:fontRef idx="minor">
+            <a:schemeClr val="lt1"/>
+          </a:fontRef>
+        </p:style>
+        <p:txBody>
+          <a:bodyPr rtlCol="0" anchor="ctr"/>
+          <a:lstStyle/>
+          <a:p/>
+        </p:txBody>
+      </p:sp>
+      <p:sp>
+        <p:nvSpPr>
+          <p:cNvPr id="15" name="Rectangle 14"/>
+          <p:cNvSpPr/>
+          <p:nvPr/>
+        </p:nvSpPr>
+        <p:spPr>
+          <a:xfrm>
+            <a:off x="2340864" y="1709928"/>
+            <a:ext cx="64008" cy="64008"/>
+          </a:xfrm>
+          <a:prstGeom prst="rect">
+            <a:avLst/>
+          </a:prstGeom>
+          <a:solidFill>
+            <a:srgbClr val="C62828"/>
+          </a:solidFill>
+          <a:ln>
+            <a:noFill/>
+          </a:ln>
+          <a:effectLst/>
+        </p:spPr>
+        <p:style>
+          <a:lnRef idx="1">
+            <a:schemeClr val="accent1"/>
+          </a:lnRef>
+          <a:fillRef idx="3">
+            <a:schemeClr val="accent1"/>
+          </a:fillRef>
+          <a:effectRef idx="2">
+            <a:schemeClr val="accent1"/>
+          </a:effectRef>
+          <a:fontRef idx="minor">
+            <a:schemeClr val="lt1"/>
+          </a:fontRef>
+        </p:style>
+        <p:txBody>
+          <a:bodyPr rtlCol="0" anchor="ctr"/>
+          <a:lstStyle/>
+          <a:p/>
+        </p:txBody>
+      </p:sp>
+      <p:sp>
+        <p:nvSpPr>
+          <p:cNvPr id="16" name="TextBox 15"/>
+          <p:cNvSpPr txBox="1"/>
+          <p:nvPr/>
+        </p:nvSpPr>
+        <p:spPr>
+          <a:xfrm>
+            <a:off x="1655064" y="1536192"/>
+            <a:ext cx="813816" cy="420624"/>
+          </a:xfrm>
+          <a:prstGeom prst="rect">
+            <a:avLst/>
+          </a:prstGeom>
+          <a:noFill/>
+        </p:spPr>
+        <p:txBody>
+          <a:bodyPr wrap="square" lIns="0" rIns="0" tIns="0" bIns="0" anchor="ctr">
+            <a:spAutoFit/>
+          </a:bodyPr>
+          <a:lstStyle/>
+          <a:p>
+            <a:pPr algn="ctr"/>
+            <a:r>
+              <a:rPr sz="1500">
+                <a:solidFill>
+                  <a:srgbClr val="C62828"/>
+                </a:solidFill>
+                <a:latin typeface="Trenda IG Display Bold"/>
+              </a:rPr>
+              <a:t>?</a:t>
+            </a:r>
+          </a:p>
+        </p:txBody>
+      </p:sp>
+      <p:sp>
+        <p:nvSpPr>
+          <p:cNvPr id="17" name="TextBox 16"/>
+          <p:cNvSpPr txBox="1"/>
+          <p:nvPr/>
+        </p:nvSpPr>
+        <p:spPr>
+          <a:xfrm>
+            <a:off x="329184" y="2231136"/>
+            <a:ext cx="3465575" cy="310896"/>
+          </a:xfrm>
+          <a:prstGeom prst="rect">
+            <a:avLst/>
+          </a:prstGeom>
+          <a:noFill/>
+        </p:spPr>
+        <p:txBody>
+          <a:bodyPr wrap="square" lIns="0" rIns="0" tIns="0" bIns="0" anchor="t">
+            <a:spAutoFit/>
+          </a:bodyPr>
+          <a:lstStyle/>
+          <a:p>
+            <a:pPr>
+              <a:lnSpc>
+                <a:spcPct val="100000"/>
+              </a:lnSpc>
+            </a:pPr>
+            <a:r>
+              <a:rPr sz="900">
+                <a:solidFill>
+                  <a:srgbClr val="C62828"/>
+                </a:solidFill>
+                <a:latin typeface="Trenda IG Text Semibold"/>
+              </a:rPr>
+              <a:t>The answer is the edge that is not there, and no table has a row for it.</a:t>
+            </a:r>
+          </a:p>
+        </p:txBody>
+      </p:sp>
+      <p:sp>
+        <p:nvSpPr>
+          <p:cNvPr id="18" name="TextBox 17"/>
+          <p:cNvSpPr txBox="1"/>
+          <p:nvPr/>
+        </p:nvSpPr>
+        <p:spPr>
+          <a:xfrm>
+            <a:off x="329184" y="2688336"/>
+            <a:ext cx="3465575" cy="182880"/>
+          </a:xfrm>
+          <a:prstGeom prst="rect">
+            <a:avLst/>
+          </a:prstGeom>
+          <a:noFill/>
+        </p:spPr>
+        <p:txBody>
+          <a:bodyPr wrap="square" lIns="0" rIns="0" tIns="0" bIns="0" anchor="t">
+            <a:spAutoFit/>
+          </a:bodyPr>
+          <a:lstStyle/>
+          <a:p>
+            <a:r>
+              <a:rPr sz="1000">
+                <a:solidFill>
+                  <a:srgbClr val="1A1A1A"/>
+                </a:solidFill>
+                <a:latin typeface="Trenda IG Text Semibold"/>
+              </a:rPr>
+              <a:t>The evidence is split</a:t>
+            </a:r>
+          </a:p>
+        </p:txBody>
+      </p:sp>
+      <p:sp>
+        <p:nvSpPr>
+          <p:cNvPr id="19" name="TextBox 18"/>
+          <p:cNvSpPr txBox="1"/>
+          <p:nvPr/>
+        </p:nvSpPr>
+        <p:spPr>
+          <a:xfrm>
+            <a:off x="329184" y="2880360"/>
+            <a:ext cx="3465575" cy="304800"/>
+          </a:xfrm>
+          <a:prstGeom prst="rect">
+            <a:avLst/>
+          </a:prstGeom>
+          <a:noFill/>
+        </p:spPr>
+        <p:txBody>
+          <a:bodyPr wrap="square" lIns="0" rIns="0" tIns="0" bIns="0" anchor="t">
+            <a:spAutoFit/>
+          </a:bodyPr>
+          <a:lstStyle/>
+          <a:p>
+            <a:pPr>
+              <a:lnSpc>
+                <a:spcPct val="100000"/>
+              </a:lnSpc>
+            </a:pPr>
+            <a:r>
+              <a:rPr sz="880">
+                <a:solidFill>
+                  <a:srgbClr val="5A6573"/>
+                </a:solidFill>
+                <a:latin typeface="Trenda IG Text"/>
+              </a:rPr>
+              <a:t>Six or eight systems that were never designed to be joined. Demand in one, supply in another, capability in a third, geography in a fourth.</a:t>
+            </a:r>
+          </a:p>
+        </p:txBody>
+      </p:sp>
+      <p:sp>
+        <p:nvSpPr>
+          <p:cNvPr id="20" name="TextBox 19"/>
+          <p:cNvSpPr txBox="1"/>
+          <p:nvPr/>
+        </p:nvSpPr>
+        <p:spPr>
+          <a:xfrm>
+            <a:off x="329184" y="3304032"/>
+            <a:ext cx="3465575" cy="182880"/>
+          </a:xfrm>
+          <a:prstGeom prst="rect">
+            <a:avLst/>
+          </a:prstGeom>
+          <a:noFill/>
+        </p:spPr>
+        <p:txBody>
+          <a:bodyPr wrap="square" lIns="0" rIns="0" tIns="0" bIns="0" anchor="t">
+            <a:spAutoFit/>
+          </a:bodyPr>
+          <a:lstStyle/>
+          <a:p>
+            <a:r>
+              <a:rPr sz="1000">
+                <a:solidFill>
+                  <a:srgbClr val="1A1A1A"/>
+                </a:solidFill>
+                <a:latin typeface="Trenda IG Text Semibold"/>
+              </a:rPr>
+              <a:t>Reports count rows</a:t>
+            </a:r>
+          </a:p>
+        </p:txBody>
+      </p:sp>
+      <p:sp>
+        <p:nvSpPr>
+          <p:cNvPr id="21" name="TextBox 20"/>
+          <p:cNvSpPr txBox="1"/>
+          <p:nvPr/>
+        </p:nvSpPr>
+        <p:spPr>
+          <a:xfrm>
+            <a:off x="329184" y="3496056"/>
+            <a:ext cx="3465575" cy="304800"/>
+          </a:xfrm>
+          <a:prstGeom prst="rect">
+            <a:avLst/>
+          </a:prstGeom>
+          <a:noFill/>
+        </p:spPr>
+        <p:txBody>
+          <a:bodyPr wrap="square" lIns="0" rIns="0" tIns="0" bIns="0" anchor="t">
+            <a:spAutoFit/>
+          </a:bodyPr>
+          <a:lstStyle/>
+          <a:p>
+            <a:pPr>
+              <a:lnSpc>
+                <a:spcPct val="100000"/>
+              </a:lnSpc>
+            </a:pPr>
+            <a:r>
+              <a:rPr sz="880">
+                <a:solidFill>
+                  <a:srgbClr val="5A6573"/>
+                </a:solidFill>
+                <a:latin typeface="Trenda IG Text"/>
+              </a:rPr>
+              <a:t>A dashboard shows you forty one specialists. It cannot show you the territory where there are none.</a:t>
+            </a:r>
+          </a:p>
+        </p:txBody>
+      </p:sp>
+      <p:sp>
+        <p:nvSpPr>
+          <p:cNvPr id="22" name="TextBox 21"/>
+          <p:cNvSpPr txBox="1"/>
+          <p:nvPr/>
+        </p:nvSpPr>
+        <p:spPr>
+          <a:xfrm>
+            <a:off x="329184" y="3919728"/>
+            <a:ext cx="3465575" cy="182880"/>
+          </a:xfrm>
+          <a:prstGeom prst="rect">
+            <a:avLst/>
+          </a:prstGeom>
+          <a:noFill/>
+        </p:spPr>
+        <p:txBody>
+          <a:bodyPr wrap="square" lIns="0" rIns="0" tIns="0" bIns="0" anchor="t">
+            <a:spAutoFit/>
+          </a:bodyPr>
+          <a:lstStyle/>
+          <a:p>
+            <a:r>
+              <a:rPr sz="1000">
+                <a:solidFill>
+                  <a:srgbClr val="1A1A1A"/>
+                </a:solidFill>
+                <a:latin typeface="Trenda IG Text Semibold"/>
+              </a:rPr>
+              <a:t>Every function sees one slice</a:t>
+            </a:r>
+          </a:p>
+        </p:txBody>
+      </p:sp>
+      <p:sp>
+        <p:nvSpPr>
+          <p:cNvPr id="23" name="TextBox 22"/>
+          <p:cNvSpPr txBox="1"/>
+          <p:nvPr/>
+        </p:nvSpPr>
+        <p:spPr>
+          <a:xfrm>
+            <a:off x="329184" y="4111752"/>
+            <a:ext cx="3465575" cy="304800"/>
+          </a:xfrm>
+          <a:prstGeom prst="rect">
+            <a:avLst/>
+          </a:prstGeom>
+          <a:noFill/>
+        </p:spPr>
+        <p:txBody>
+          <a:bodyPr wrap="square" lIns="0" rIns="0" tIns="0" bIns="0" anchor="t">
+            <a:spAutoFit/>
+          </a:bodyPr>
+          <a:lstStyle/>
+          <a:p>
+            <a:pPr>
+              <a:lnSpc>
+                <a:spcPct val="100000"/>
+              </a:lnSpc>
+            </a:pPr>
+            <a:r>
+              <a:rPr sz="880">
+                <a:solidFill>
+                  <a:srgbClr val="5A6573"/>
+                </a:solidFill>
+                <a:latin typeface="Trenda IG Text"/>
+              </a:rPr>
+              <a:t>Sales sees demand, operations sees capacity, HR sees credentials, finance sees the leak. Nobody holds the join.</a:t>
+            </a:r>
+          </a:p>
+        </p:txBody>
+      </p:sp>
+      <p:sp>
+        <p:nvSpPr>
+          <p:cNvPr id="24" name="TextBox 23"/>
+          <p:cNvSpPr txBox="1"/>
+          <p:nvPr/>
+        </p:nvSpPr>
+        <p:spPr>
+          <a:xfrm>
+            <a:off x="329184" y="4535424"/>
+            <a:ext cx="3465575" cy="182880"/>
+          </a:xfrm>
+          <a:prstGeom prst="rect">
+            <a:avLst/>
+          </a:prstGeom>
+          <a:noFill/>
+        </p:spPr>
+        <p:txBody>
+          <a:bodyPr wrap="square" lIns="0" rIns="0" tIns="0" bIns="0" anchor="t">
+            <a:spAutoFit/>
+          </a:bodyPr>
+          <a:lstStyle/>
+          <a:p>
+            <a:r>
+              <a:rPr sz="1000">
+                <a:solidFill>
+                  <a:srgbClr val="1A1A1A"/>
+                </a:solidFill>
+                <a:latin typeface="Trenda IG Text Semibold"/>
+              </a:rPr>
+              <a:t>So gaps are found the expensive way</a:t>
+            </a:r>
+          </a:p>
+        </p:txBody>
+      </p:sp>
+      <p:sp>
+        <p:nvSpPr>
+          <p:cNvPr id="25" name="TextBox 24"/>
+          <p:cNvSpPr txBox="1"/>
+          <p:nvPr/>
+        </p:nvSpPr>
+        <p:spPr>
+          <a:xfrm>
+            <a:off x="329184" y="4727448"/>
+            <a:ext cx="3465575" cy="304800"/>
+          </a:xfrm>
+          <a:prstGeom prst="rect">
+            <a:avLst/>
+          </a:prstGeom>
+          <a:noFill/>
+        </p:spPr>
+        <p:txBody>
+          <a:bodyPr wrap="square" lIns="0" rIns="0" tIns="0" bIns="0" anchor="t">
+            <a:spAutoFit/>
+          </a:bodyPr>
+          <a:lstStyle/>
+          <a:p>
+            <a:pPr>
+              <a:lnSpc>
+                <a:spcPct val="100000"/>
+              </a:lnSpc>
+            </a:pPr>
+            <a:r>
+              <a:rPr sz="880">
+                <a:solidFill>
+                  <a:srgbClr val="5A6573"/>
+                </a:solidFill>
+                <a:latin typeface="Trenda IG Text"/>
+              </a:rPr>
+              <a:t>The customer leaves, the regulator asks, or the asset sits idle for a year.</a:t>
+            </a:r>
+          </a:p>
+        </p:txBody>
+      </p:sp>
+      <p:sp>
+        <p:nvSpPr>
+          <p:cNvPr id="26" name="Rectangle 25"/>
+          <p:cNvSpPr/>
+          <p:nvPr/>
+        </p:nvSpPr>
+        <p:spPr>
+          <a:xfrm>
+            <a:off x="4142232" y="987552"/>
+            <a:ext cx="3904487" cy="4572000"/>
+          </a:xfrm>
+          <a:prstGeom prst="rect">
+            <a:avLst/>
+          </a:prstGeom>
+          <a:solidFill>
+            <a:srgbClr val="F4F6F9"/>
+          </a:solidFill>
+          <a:ln w="9525">
+            <a:solidFill>
+              <a:srgbClr val="D5D9DE"/>
+            </a:solidFill>
+          </a:ln>
+          <a:effectLst/>
+        </p:spPr>
+        <p:style>
+          <a:lnRef idx="1">
+            <a:schemeClr val="accent1"/>
+          </a:lnRef>
+          <a:fillRef idx="3">
+            <a:schemeClr val="accent1"/>
+          </a:fillRef>
+          <a:effectRef idx="2">
+            <a:schemeClr val="accent1"/>
+          </a:effectRef>
+          <a:fontRef idx="minor">
+            <a:schemeClr val="lt1"/>
+          </a:fontRef>
+        </p:style>
+        <p:txBody>
+          <a:bodyPr rtlCol="0" anchor="ctr"/>
+          <a:lstStyle/>
+          <a:p/>
+        </p:txBody>
+      </p:sp>
+      <p:sp>
+        <p:nvSpPr>
+          <p:cNvPr id="27" name="Rectangle 26"/>
+          <p:cNvSpPr/>
+          <p:nvPr/>
+        </p:nvSpPr>
+        <p:spPr>
+          <a:xfrm>
+            <a:off x="4325112" y="1197864"/>
+            <a:ext cx="91440" cy="91440"/>
+          </a:xfrm>
+          <a:prstGeom prst="rect">
+            <a:avLst/>
+          </a:prstGeom>
+          <a:solidFill>
+            <a:srgbClr val="C77400"/>
+          </a:solidFill>
+          <a:ln>
+            <a:noFill/>
+          </a:ln>
+          <a:effectLst/>
+        </p:spPr>
+        <p:style>
+          <a:lnRef idx="1">
+            <a:schemeClr val="accent1"/>
+          </a:lnRef>
+          <a:fillRef idx="3">
+            <a:schemeClr val="accent1"/>
+          </a:fillRef>
+          <a:effectRef idx="2">
+            <a:schemeClr val="accent1"/>
+          </a:effectRef>
+          <a:fontRef idx="minor">
+            <a:schemeClr val="lt1"/>
+          </a:fontRef>
+        </p:style>
+        <p:txBody>
+          <a:bodyPr rtlCol="0" anchor="ctr"/>
+          <a:lstStyle/>
+          <a:p/>
+        </p:txBody>
+      </p:sp>
+      <p:sp>
+        <p:nvSpPr>
+          <p:cNvPr id="28" name="TextBox 27"/>
+          <p:cNvSpPr txBox="1"/>
+          <p:nvPr/>
+        </p:nvSpPr>
+        <p:spPr>
+          <a:xfrm>
+            <a:off x="4507992" y="1115568"/>
+            <a:ext cx="3355847" cy="274320"/>
+          </a:xfrm>
+          <a:prstGeom prst="rect">
+            <a:avLst/>
+          </a:prstGeom>
+          <a:noFill/>
+        </p:spPr>
+        <p:txBody>
+          <a:bodyPr wrap="square" lIns="0" rIns="0" tIns="0" bIns="0" anchor="t">
+            <a:spAutoFit/>
+          </a:bodyPr>
+          <a:lstStyle/>
+          <a:p>
+            <a:r>
+              <a:rPr sz="1400">
+                <a:solidFill>
+                  <a:srgbClr val="1A1A1A"/>
+                </a:solidFill>
+                <a:latin typeface="Trenda IG Display Bold"/>
+              </a:rPr>
+              <a:t>What it costs, in any industry</a:t>
+            </a:r>
+          </a:p>
+        </p:txBody>
+      </p:sp>
+      <p:sp>
+        <p:nvSpPr>
+          <p:cNvPr id="29" name="Rectangle 28"/>
+          <p:cNvSpPr/>
+          <p:nvPr/>
+        </p:nvSpPr>
+        <p:spPr>
+          <a:xfrm>
+            <a:off x="4325112" y="1536192"/>
+            <a:ext cx="3538727" cy="603504"/>
+          </a:xfrm>
+          <a:prstGeom prst="rect">
+            <a:avLst/>
+          </a:prstGeom>
+          <a:solidFill>
+            <a:srgbClr val="FFFFFF"/>
+          </a:solidFill>
+          <a:ln w="9525">
+            <a:solidFill>
+              <a:srgbClr val="D5D9DE"/>
+            </a:solidFill>
+          </a:ln>
+          <a:effectLst/>
+        </p:spPr>
+        <p:style>
+          <a:lnRef idx="1">
+            <a:schemeClr val="accent1"/>
+          </a:lnRef>
+          <a:fillRef idx="3">
+            <a:schemeClr val="accent1"/>
+          </a:fillRef>
+          <a:effectRef idx="2">
+            <a:schemeClr val="accent1"/>
+          </a:effectRef>
+          <a:fontRef idx="minor">
+            <a:schemeClr val="lt1"/>
+          </a:fontRef>
+        </p:style>
+        <p:txBody>
+          <a:bodyPr rtlCol="0" anchor="ctr"/>
+          <a:lstStyle/>
+          <a:p/>
+        </p:txBody>
+      </p:sp>
+      <p:sp>
+        <p:nvSpPr>
+          <p:cNvPr id="30" name="Rectangle 29"/>
+          <p:cNvSpPr/>
+          <p:nvPr/>
+        </p:nvSpPr>
+        <p:spPr>
+          <a:xfrm>
+            <a:off x="4453128" y="1655064"/>
+            <a:ext cx="73152" cy="73152"/>
+          </a:xfrm>
+          <a:prstGeom prst="rect">
+            <a:avLst/>
+          </a:prstGeom>
+          <a:solidFill>
+            <a:srgbClr val="C77400"/>
+          </a:solidFill>
+          <a:ln>
+            <a:noFill/>
+          </a:ln>
+          <a:effectLst/>
+        </p:spPr>
+        <p:style>
+          <a:lnRef idx="1">
+            <a:schemeClr val="accent1"/>
+          </a:lnRef>
+          <a:fillRef idx="3">
+            <a:schemeClr val="accent1"/>
+          </a:fillRef>
+          <a:effectRef idx="2">
+            <a:schemeClr val="accent1"/>
+          </a:effectRef>
+          <a:fontRef idx="minor">
+            <a:schemeClr val="lt1"/>
+          </a:fontRef>
+        </p:style>
+        <p:txBody>
+          <a:bodyPr rtlCol="0" anchor="ctr"/>
+          <a:lstStyle/>
+          <a:p/>
+        </p:txBody>
+      </p:sp>
+      <p:sp>
+        <p:nvSpPr>
+          <p:cNvPr id="31" name="TextBox 30"/>
+          <p:cNvSpPr txBox="1"/>
+          <p:nvPr/>
+        </p:nvSpPr>
+        <p:spPr>
+          <a:xfrm>
+            <a:off x="4581144" y="1600200"/>
+            <a:ext cx="3246120" cy="182880"/>
+          </a:xfrm>
+          <a:prstGeom prst="rect">
+            <a:avLst/>
+          </a:prstGeom>
+          <a:noFill/>
+        </p:spPr>
+        <p:txBody>
+          <a:bodyPr wrap="square" lIns="0" rIns="0" tIns="0" bIns="0" anchor="t">
+            <a:spAutoFit/>
+          </a:bodyPr>
+          <a:lstStyle/>
+          <a:p>
+            <a:r>
+              <a:rPr sz="1000">
+                <a:solidFill>
+                  <a:srgbClr val="1A1A1A"/>
+                </a:solidFill>
+                <a:latin typeface="Trenda IG Text Semibold"/>
+              </a:rPr>
+              <a:t>Demand you cannot serve</a:t>
+            </a:r>
+          </a:p>
+        </p:txBody>
+      </p:sp>
+      <p:sp>
+        <p:nvSpPr>
+          <p:cNvPr id="32" name="TextBox 31"/>
+          <p:cNvSpPr txBox="1"/>
+          <p:nvPr/>
+        </p:nvSpPr>
+        <p:spPr>
+          <a:xfrm>
+            <a:off x="4581144" y="1792224"/>
+            <a:ext cx="3264407" cy="310896"/>
+          </a:xfrm>
+          <a:prstGeom prst="rect">
+            <a:avLst/>
+          </a:prstGeom>
+          <a:noFill/>
+        </p:spPr>
+        <p:txBody>
+          <a:bodyPr wrap="square" lIns="0" rIns="0" tIns="0" bIns="0" anchor="t">
+            <a:spAutoFit/>
+          </a:bodyPr>
+          <a:lstStyle/>
+          <a:p>
+            <a:pPr>
+              <a:lnSpc>
+                <a:spcPct val="100000"/>
+              </a:lnSpc>
+            </a:pPr>
+            <a:r>
+              <a:rPr sz="880">
+                <a:solidFill>
+                  <a:srgbClr val="5A6573"/>
+                </a:solidFill>
+                <a:latin typeface="Trenda IG Text"/>
+              </a:rPr>
+              <a:t>Someone arrives and nobody qualified is within reach</a:t>
+            </a:r>
+          </a:p>
+        </p:txBody>
+      </p:sp>
+      <p:sp>
+        <p:nvSpPr>
+          <p:cNvPr id="33" name="Rectangle 32"/>
+          <p:cNvSpPr/>
+          <p:nvPr/>
+        </p:nvSpPr>
+        <p:spPr>
+          <a:xfrm>
+            <a:off x="4325112" y="2185415"/>
+            <a:ext cx="3538727" cy="603504"/>
+          </a:xfrm>
+          <a:prstGeom prst="rect">
+            <a:avLst/>
+          </a:prstGeom>
+          <a:solidFill>
+            <a:srgbClr val="FFFFFF"/>
+          </a:solidFill>
+          <a:ln w="9525">
+            <a:solidFill>
+              <a:srgbClr val="D5D9DE"/>
+            </a:solidFill>
+          </a:ln>
+          <a:effectLst/>
+        </p:spPr>
+        <p:style>
+          <a:lnRef idx="1">
+            <a:schemeClr val="accent1"/>
+          </a:lnRef>
+          <a:fillRef idx="3">
+            <a:schemeClr val="accent1"/>
+          </a:fillRef>
+          <a:effectRef idx="2">
+            <a:schemeClr val="accent1"/>
+          </a:effectRef>
+          <a:fontRef idx="minor">
+            <a:schemeClr val="lt1"/>
+          </a:fontRef>
+        </p:style>
+        <p:txBody>
+          <a:bodyPr rtlCol="0" anchor="ctr"/>
+          <a:lstStyle/>
+          <a:p/>
+        </p:txBody>
+      </p:sp>
+      <p:sp>
+        <p:nvSpPr>
+          <p:cNvPr id="34" name="Rectangle 33"/>
+          <p:cNvSpPr/>
+          <p:nvPr/>
+        </p:nvSpPr>
+        <p:spPr>
+          <a:xfrm>
+            <a:off x="4453128" y="2304287"/>
+            <a:ext cx="73152" cy="73152"/>
+          </a:xfrm>
+          <a:prstGeom prst="rect">
+            <a:avLst/>
+          </a:prstGeom>
+          <a:solidFill>
+            <a:srgbClr val="C77400"/>
+          </a:solidFill>
+          <a:ln>
+            <a:noFill/>
+          </a:ln>
+          <a:effectLst/>
+        </p:spPr>
+        <p:style>
+          <a:lnRef idx="1">
+            <a:schemeClr val="accent1"/>
+          </a:lnRef>
+          <a:fillRef idx="3">
+            <a:schemeClr val="accent1"/>
+          </a:fillRef>
+          <a:effectRef idx="2">
+            <a:schemeClr val="accent1"/>
+          </a:effectRef>
+          <a:fontRef idx="minor">
+            <a:schemeClr val="lt1"/>
+          </a:fontRef>
+        </p:style>
+        <p:txBody>
+          <a:bodyPr rtlCol="0" anchor="ctr"/>
+          <a:lstStyle/>
+          <a:p/>
+        </p:txBody>
+      </p:sp>
+      <p:sp>
+        <p:nvSpPr>
+          <p:cNvPr id="35" name="TextBox 34"/>
+          <p:cNvSpPr txBox="1"/>
+          <p:nvPr/>
+        </p:nvSpPr>
+        <p:spPr>
+          <a:xfrm>
+            <a:off x="4581144" y="2249423"/>
+            <a:ext cx="3246120" cy="182880"/>
+          </a:xfrm>
+          <a:prstGeom prst="rect">
+            <a:avLst/>
+          </a:prstGeom>
+          <a:noFill/>
+        </p:spPr>
+        <p:txBody>
+          <a:bodyPr wrap="square" lIns="0" rIns="0" tIns="0" bIns="0" anchor="t">
+            <a:spAutoFit/>
+          </a:bodyPr>
+          <a:lstStyle/>
+          <a:p>
+            <a:r>
+              <a:rPr sz="1000">
+                <a:solidFill>
+                  <a:srgbClr val="1A1A1A"/>
+                </a:solidFill>
+                <a:latin typeface="Trenda IG Text Semibold"/>
+              </a:rPr>
+              <a:t>Supply that earns nothing</a:t>
+            </a:r>
+          </a:p>
+        </p:txBody>
+      </p:sp>
+      <p:sp>
+        <p:nvSpPr>
+          <p:cNvPr id="36" name="TextBox 35"/>
+          <p:cNvSpPr txBox="1"/>
+          <p:nvPr/>
+        </p:nvSpPr>
+        <p:spPr>
+          <a:xfrm>
+            <a:off x="4581144" y="2441448"/>
+            <a:ext cx="3264407" cy="310896"/>
+          </a:xfrm>
+          <a:prstGeom prst="rect">
+            <a:avLst/>
+          </a:prstGeom>
+          <a:noFill/>
+        </p:spPr>
+        <p:txBody>
+          <a:bodyPr wrap="square" lIns="0" rIns="0" tIns="0" bIns="0" anchor="t">
+            <a:spAutoFit/>
+          </a:bodyPr>
+          <a:lstStyle/>
+          <a:p>
+            <a:pPr>
+              <a:lnSpc>
+                <a:spcPct val="100000"/>
+              </a:lnSpc>
+            </a:pPr>
+            <a:r>
+              <a:rPr sz="880">
+                <a:solidFill>
+                  <a:srgbClr val="5A6573"/>
+                </a:solidFill>
+                <a:latin typeface="Trenda IG Text"/>
+              </a:rPr>
+              <a:t>Capacity paid for, sitting idle, in the wrong place</a:t>
+            </a:r>
+          </a:p>
+        </p:txBody>
+      </p:sp>
+      <p:sp>
+        <p:nvSpPr>
+          <p:cNvPr id="37" name="Rectangle 36"/>
+          <p:cNvSpPr/>
+          <p:nvPr/>
+        </p:nvSpPr>
+        <p:spPr>
+          <a:xfrm>
+            <a:off x="4325112" y="2834639"/>
+            <a:ext cx="3538727" cy="603504"/>
+          </a:xfrm>
+          <a:prstGeom prst="rect">
+            <a:avLst/>
+          </a:prstGeom>
+          <a:solidFill>
+            <a:srgbClr val="FFFFFF"/>
+          </a:solidFill>
+          <a:ln w="9525">
+            <a:solidFill>
+              <a:srgbClr val="D5D9DE"/>
+            </a:solidFill>
+          </a:ln>
+          <a:effectLst/>
+        </p:spPr>
+        <p:style>
+          <a:lnRef idx="1">
+            <a:schemeClr val="accent1"/>
+          </a:lnRef>
+          <a:fillRef idx="3">
+            <a:schemeClr val="accent1"/>
+          </a:fillRef>
+          <a:effectRef idx="2">
+            <a:schemeClr val="accent1"/>
+          </a:effectRef>
+          <a:fontRef idx="minor">
+            <a:schemeClr val="lt1"/>
+          </a:fontRef>
+        </p:style>
+        <p:txBody>
+          <a:bodyPr rtlCol="0" anchor="ctr"/>
+          <a:lstStyle/>
+          <a:p/>
+        </p:txBody>
+      </p:sp>
+      <p:sp>
+        <p:nvSpPr>
+          <p:cNvPr id="38" name="Rectangle 37"/>
+          <p:cNvSpPr/>
+          <p:nvPr/>
+        </p:nvSpPr>
+        <p:spPr>
+          <a:xfrm>
+            <a:off x="4453128" y="2953511"/>
+            <a:ext cx="73152" cy="73152"/>
+          </a:xfrm>
+          <a:prstGeom prst="rect">
+            <a:avLst/>
+          </a:prstGeom>
+          <a:solidFill>
+            <a:srgbClr val="C77400"/>
+          </a:solidFill>
+          <a:ln>
+            <a:noFill/>
+          </a:ln>
+          <a:effectLst/>
+        </p:spPr>
+        <p:style>
+          <a:lnRef idx="1">
+            <a:schemeClr val="accent1"/>
+          </a:lnRef>
+          <a:fillRef idx="3">
+            <a:schemeClr val="accent1"/>
+          </a:fillRef>
+          <a:effectRef idx="2">
+            <a:schemeClr val="accent1"/>
+          </a:effectRef>
+          <a:fontRef idx="minor">
+            <a:schemeClr val="lt1"/>
+          </a:fontRef>
+        </p:style>
+        <p:txBody>
+          <a:bodyPr rtlCol="0" anchor="ctr"/>
+          <a:lstStyle/>
+          <a:p/>
+        </p:txBody>
+      </p:sp>
+      <p:sp>
+        <p:nvSpPr>
+          <p:cNvPr id="39" name="TextBox 38"/>
+          <p:cNvSpPr txBox="1"/>
+          <p:nvPr/>
+        </p:nvSpPr>
+        <p:spPr>
+          <a:xfrm>
+            <a:off x="4581144" y="2898647"/>
+            <a:ext cx="3246120" cy="182880"/>
+          </a:xfrm>
+          <a:prstGeom prst="rect">
+            <a:avLst/>
+          </a:prstGeom>
+          <a:noFill/>
+        </p:spPr>
+        <p:txBody>
+          <a:bodyPr wrap="square" lIns="0" rIns="0" tIns="0" bIns="0" anchor="t">
+            <a:spAutoFit/>
+          </a:bodyPr>
+          <a:lstStyle/>
+          <a:p>
+            <a:r>
+              <a:rPr sz="1000">
+                <a:solidFill>
+                  <a:srgbClr val="1A1A1A"/>
+                </a:solidFill>
+                <a:latin typeface="Trenda IG Text Semibold"/>
+              </a:rPr>
+              <a:t>Assets stranded</a:t>
+            </a:r>
+          </a:p>
+        </p:txBody>
+      </p:sp>
+      <p:sp>
+        <p:nvSpPr>
+          <p:cNvPr id="40" name="TextBox 39"/>
+          <p:cNvSpPr txBox="1"/>
+          <p:nvPr/>
+        </p:nvSpPr>
+        <p:spPr>
+          <a:xfrm>
+            <a:off x="4581144" y="3090672"/>
+            <a:ext cx="3264407" cy="310896"/>
+          </a:xfrm>
+          <a:prstGeom prst="rect">
+            <a:avLst/>
+          </a:prstGeom>
+          <a:noFill/>
+        </p:spPr>
+        <p:txBody>
+          <a:bodyPr wrap="square" lIns="0" rIns="0" tIns="0" bIns="0" anchor="t">
+            <a:spAutoFit/>
+          </a:bodyPr>
+          <a:lstStyle/>
+          <a:p>
+            <a:pPr>
+              <a:lnSpc>
+                <a:spcPct val="100000"/>
+              </a:lnSpc>
+            </a:pPr>
+            <a:r>
+              <a:rPr sz="880">
+                <a:solidFill>
+                  <a:srgbClr val="5A6573"/>
+                </a:solidFill>
+                <a:latin typeface="Trenda IG Text"/>
+              </a:rPr>
+              <a:t>The equipment or licence is there. The person permitted to use it is not</a:t>
+            </a:r>
+          </a:p>
+        </p:txBody>
+      </p:sp>
+      <p:sp>
+        <p:nvSpPr>
+          <p:cNvPr id="41" name="Rectangle 40"/>
+          <p:cNvSpPr/>
+          <p:nvPr/>
+        </p:nvSpPr>
+        <p:spPr>
+          <a:xfrm>
+            <a:off x="4325112" y="3483863"/>
+            <a:ext cx="3538727" cy="603504"/>
+          </a:xfrm>
+          <a:prstGeom prst="rect">
+            <a:avLst/>
+          </a:prstGeom>
+          <a:solidFill>
+            <a:srgbClr val="FFFFFF"/>
+          </a:solidFill>
+          <a:ln w="9525">
+            <a:solidFill>
+              <a:srgbClr val="D5D9DE"/>
+            </a:solidFill>
+          </a:ln>
+          <a:effectLst/>
+        </p:spPr>
+        <p:style>
+          <a:lnRef idx="1">
+            <a:schemeClr val="accent1"/>
+          </a:lnRef>
+          <a:fillRef idx="3">
+            <a:schemeClr val="accent1"/>
+          </a:fillRef>
+          <a:effectRef idx="2">
+            <a:schemeClr val="accent1"/>
+          </a:effectRef>
+          <a:fontRef idx="minor">
+            <a:schemeClr val="lt1"/>
+          </a:fontRef>
+        </p:style>
+        <p:txBody>
+          <a:bodyPr rtlCol="0" anchor="ctr"/>
+          <a:lstStyle/>
+          <a:p/>
+        </p:txBody>
+      </p:sp>
+      <p:sp>
+        <p:nvSpPr>
+          <p:cNvPr id="42" name="Rectangle 41"/>
+          <p:cNvSpPr/>
+          <p:nvPr/>
+        </p:nvSpPr>
+        <p:spPr>
+          <a:xfrm>
+            <a:off x="4453128" y="3602735"/>
+            <a:ext cx="73152" cy="73152"/>
+          </a:xfrm>
+          <a:prstGeom prst="rect">
+            <a:avLst/>
+          </a:prstGeom>
+          <a:solidFill>
+            <a:srgbClr val="C77400"/>
+          </a:solidFill>
+          <a:ln>
+            <a:noFill/>
+          </a:ln>
+          <a:effectLst/>
+        </p:spPr>
+        <p:style>
+          <a:lnRef idx="1">
+            <a:schemeClr val="accent1"/>
+          </a:lnRef>
+          <a:fillRef idx="3">
+            <a:schemeClr val="accent1"/>
+          </a:fillRef>
+          <a:effectRef idx="2">
+            <a:schemeClr val="accent1"/>
+          </a:effectRef>
+          <a:fontRef idx="minor">
+            <a:schemeClr val="lt1"/>
+          </a:fontRef>
+        </p:style>
+        <p:txBody>
+          <a:bodyPr rtlCol="0" anchor="ctr"/>
+          <a:lstStyle/>
+          <a:p/>
+        </p:txBody>
+      </p:sp>
+      <p:sp>
+        <p:nvSpPr>
+          <p:cNvPr id="43" name="TextBox 42"/>
+          <p:cNvSpPr txBox="1"/>
+          <p:nvPr/>
+        </p:nvSpPr>
+        <p:spPr>
+          <a:xfrm>
+            <a:off x="4581144" y="3547871"/>
+            <a:ext cx="3246120" cy="182880"/>
+          </a:xfrm>
+          <a:prstGeom prst="rect">
+            <a:avLst/>
+          </a:prstGeom>
+          <a:noFill/>
+        </p:spPr>
+        <p:txBody>
+          <a:bodyPr wrap="square" lIns="0" rIns="0" tIns="0" bIns="0" anchor="t">
+            <a:spAutoFit/>
+          </a:bodyPr>
+          <a:lstStyle/>
+          <a:p>
+            <a:r>
+              <a:rPr sz="1000">
+                <a:solidFill>
+                  <a:srgbClr val="1A1A1A"/>
+                </a:solidFill>
+                <a:latin typeface="Trenda IG Text Semibold"/>
+              </a:rPr>
+              <a:t>Value leaking out</a:t>
+            </a:r>
+          </a:p>
+        </p:txBody>
+      </p:sp>
+      <p:sp>
+        <p:nvSpPr>
+          <p:cNvPr id="44" name="TextBox 43"/>
+          <p:cNvSpPr txBox="1"/>
+          <p:nvPr/>
+        </p:nvSpPr>
+        <p:spPr>
+          <a:xfrm>
+            <a:off x="4581144" y="3739896"/>
+            <a:ext cx="3264407" cy="310896"/>
+          </a:xfrm>
+          <a:prstGeom prst="rect">
+            <a:avLst/>
+          </a:prstGeom>
+          <a:noFill/>
+        </p:spPr>
+        <p:txBody>
+          <a:bodyPr wrap="square" lIns="0" rIns="0" tIns="0" bIns="0" anchor="t">
+            <a:spAutoFit/>
+          </a:bodyPr>
+          <a:lstStyle/>
+          <a:p>
+            <a:pPr>
+              <a:lnSpc>
+                <a:spcPct val="100000"/>
+              </a:lnSpc>
+            </a:pPr>
+            <a:r>
+              <a:rPr sz="880">
+                <a:solidFill>
+                  <a:srgbClr val="5A6573"/>
+                </a:solidFill>
+                <a:latin typeface="Trenda IG Text"/>
+              </a:rPr>
+              <a:t>It flows to a competitor along a path nobody traces</a:t>
+            </a:r>
+          </a:p>
+        </p:txBody>
+      </p:sp>
+      <p:sp>
+        <p:nvSpPr>
+          <p:cNvPr id="45" name="Rectangle 44"/>
+          <p:cNvSpPr/>
+          <p:nvPr/>
+        </p:nvSpPr>
+        <p:spPr>
+          <a:xfrm>
+            <a:off x="4325112" y="4133087"/>
+            <a:ext cx="3538727" cy="603504"/>
+          </a:xfrm>
+          <a:prstGeom prst="rect">
+            <a:avLst/>
+          </a:prstGeom>
+          <a:solidFill>
+            <a:srgbClr val="FFFFFF"/>
+          </a:solidFill>
+          <a:ln w="9525">
+            <a:solidFill>
+              <a:srgbClr val="D5D9DE"/>
+            </a:solidFill>
+          </a:ln>
+          <a:effectLst/>
+        </p:spPr>
+        <p:style>
+          <a:lnRef idx="1">
+            <a:schemeClr val="accent1"/>
+          </a:lnRef>
+          <a:fillRef idx="3">
+            <a:schemeClr val="accent1"/>
+          </a:fillRef>
+          <a:effectRef idx="2">
+            <a:schemeClr val="accent1"/>
+          </a:effectRef>
+          <a:fontRef idx="minor">
+            <a:schemeClr val="lt1"/>
+          </a:fontRef>
+        </p:style>
+        <p:txBody>
+          <a:bodyPr rtlCol="0" anchor="ctr"/>
+          <a:lstStyle/>
+          <a:p/>
+        </p:txBody>
+      </p:sp>
+      <p:sp>
+        <p:nvSpPr>
+          <p:cNvPr id="46" name="Rectangle 45"/>
+          <p:cNvSpPr/>
+          <p:nvPr/>
+        </p:nvSpPr>
+        <p:spPr>
+          <a:xfrm>
+            <a:off x="4453128" y="4251959"/>
+            <a:ext cx="73152" cy="73152"/>
+          </a:xfrm>
+          <a:prstGeom prst="rect">
+            <a:avLst/>
+          </a:prstGeom>
+          <a:solidFill>
+            <a:srgbClr val="C77400"/>
+          </a:solidFill>
+          <a:ln>
+            <a:noFill/>
+          </a:ln>
+          <a:effectLst/>
+        </p:spPr>
+        <p:style>
+          <a:lnRef idx="1">
+            <a:schemeClr val="accent1"/>
+          </a:lnRef>
+          <a:fillRef idx="3">
+            <a:schemeClr val="accent1"/>
+          </a:fillRef>
+          <a:effectRef idx="2">
+            <a:schemeClr val="accent1"/>
+          </a:effectRef>
+          <a:fontRef idx="minor">
+            <a:schemeClr val="lt1"/>
+          </a:fontRef>
+        </p:style>
+        <p:txBody>
+          <a:bodyPr rtlCol="0" anchor="ctr"/>
+          <a:lstStyle/>
+          <a:p/>
+        </p:txBody>
+      </p:sp>
+      <p:sp>
+        <p:nvSpPr>
+          <p:cNvPr id="47" name="TextBox 46"/>
+          <p:cNvSpPr txBox="1"/>
+          <p:nvPr/>
+        </p:nvSpPr>
+        <p:spPr>
+          <a:xfrm>
+            <a:off x="4581144" y="4197096"/>
+            <a:ext cx="3246120" cy="182880"/>
+          </a:xfrm>
+          <a:prstGeom prst="rect">
+            <a:avLst/>
+          </a:prstGeom>
+          <a:noFill/>
+        </p:spPr>
+        <p:txBody>
+          <a:bodyPr wrap="square" lIns="0" rIns="0" tIns="0" bIns="0" anchor="t">
+            <a:spAutoFit/>
+          </a:bodyPr>
+          <a:lstStyle/>
+          <a:p>
+            <a:r>
+              <a:rPr sz="1000">
+                <a:solidFill>
+                  <a:srgbClr val="1A1A1A"/>
+                </a:solidFill>
+                <a:latin typeface="Trenda IG Text Semibold"/>
+              </a:rPr>
+              <a:t>Commitments that evaporate</a:t>
+            </a:r>
+          </a:p>
+        </p:txBody>
+      </p:sp>
+      <p:sp>
+        <p:nvSpPr>
+          <p:cNvPr id="48" name="TextBox 47"/>
+          <p:cNvSpPr txBox="1"/>
+          <p:nvPr/>
+        </p:nvSpPr>
+        <p:spPr>
+          <a:xfrm>
+            <a:off x="4581144" y="4389120"/>
+            <a:ext cx="3264407" cy="310896"/>
+          </a:xfrm>
+          <a:prstGeom prst="rect">
+            <a:avLst/>
+          </a:prstGeom>
+          <a:noFill/>
+        </p:spPr>
+        <p:txBody>
+          <a:bodyPr wrap="square" lIns="0" rIns="0" tIns="0" bIns="0" anchor="t">
+            <a:spAutoFit/>
+          </a:bodyPr>
+          <a:lstStyle/>
+          <a:p>
+            <a:pPr>
+              <a:lnSpc>
+                <a:spcPct val="100000"/>
+              </a:lnSpc>
+            </a:pPr>
+            <a:r>
+              <a:rPr sz="880">
+                <a:solidFill>
+                  <a:srgbClr val="5A6573"/>
+                </a:solidFill>
+                <a:latin typeface="Trenda IG Text"/>
+              </a:rPr>
+              <a:t>Bookings cancelled, orders lost, installations missed</a:t>
+            </a:r>
+          </a:p>
+        </p:txBody>
+      </p:sp>
+      <p:sp>
+        <p:nvSpPr>
+          <p:cNvPr id="49" name="Rectangle 48"/>
+          <p:cNvSpPr/>
+          <p:nvPr/>
+        </p:nvSpPr>
+        <p:spPr>
+          <a:xfrm>
+            <a:off x="4325112" y="4782312"/>
+            <a:ext cx="3538727" cy="603504"/>
+          </a:xfrm>
+          <a:prstGeom prst="rect">
+            <a:avLst/>
+          </a:prstGeom>
+          <a:solidFill>
+            <a:srgbClr val="FFFFFF"/>
+          </a:solidFill>
+          <a:ln w="9525">
+            <a:solidFill>
+              <a:srgbClr val="D5D9DE"/>
+            </a:solidFill>
+          </a:ln>
+          <a:effectLst/>
+        </p:spPr>
+        <p:style>
+          <a:lnRef idx="1">
+            <a:schemeClr val="accent1"/>
+          </a:lnRef>
+          <a:fillRef idx="3">
+            <a:schemeClr val="accent1"/>
+          </a:fillRef>
+          <a:effectRef idx="2">
+            <a:schemeClr val="accent1"/>
+          </a:effectRef>
+          <a:fontRef idx="minor">
+            <a:schemeClr val="lt1"/>
+          </a:fontRef>
+        </p:style>
+        <p:txBody>
+          <a:bodyPr rtlCol="0" anchor="ctr"/>
+          <a:lstStyle/>
+          <a:p/>
+        </p:txBody>
+      </p:sp>
+      <p:sp>
+        <p:nvSpPr>
+          <p:cNvPr id="50" name="Rectangle 49"/>
+          <p:cNvSpPr/>
+          <p:nvPr/>
+        </p:nvSpPr>
+        <p:spPr>
+          <a:xfrm>
+            <a:off x="4453128" y="4901183"/>
+            <a:ext cx="73152" cy="73152"/>
+          </a:xfrm>
+          <a:prstGeom prst="rect">
+            <a:avLst/>
+          </a:prstGeom>
+          <a:solidFill>
+            <a:srgbClr val="C77400"/>
+          </a:solidFill>
+          <a:ln>
+            <a:noFill/>
+          </a:ln>
+          <a:effectLst/>
+        </p:spPr>
+        <p:style>
+          <a:lnRef idx="1">
+            <a:schemeClr val="accent1"/>
+          </a:lnRef>
+          <a:fillRef idx="3">
+            <a:schemeClr val="accent1"/>
+          </a:fillRef>
+          <a:effectRef idx="2">
+            <a:schemeClr val="accent1"/>
+          </a:effectRef>
+          <a:fontRef idx="minor">
+            <a:schemeClr val="lt1"/>
+          </a:fontRef>
+        </p:style>
+        <p:txBody>
+          <a:bodyPr rtlCol="0" anchor="ctr"/>
+          <a:lstStyle/>
+          <a:p/>
+        </p:txBody>
+      </p:sp>
+      <p:sp>
+        <p:nvSpPr>
+          <p:cNvPr id="51" name="TextBox 50"/>
+          <p:cNvSpPr txBox="1"/>
+          <p:nvPr/>
+        </p:nvSpPr>
+        <p:spPr>
+          <a:xfrm>
+            <a:off x="4581144" y="4846320"/>
+            <a:ext cx="3246120" cy="182880"/>
+          </a:xfrm>
+          <a:prstGeom prst="rect">
+            <a:avLst/>
+          </a:prstGeom>
+          <a:noFill/>
+        </p:spPr>
+        <p:txBody>
+          <a:bodyPr wrap="square" lIns="0" rIns="0" tIns="0" bIns="0" anchor="t">
+            <a:spAutoFit/>
+          </a:bodyPr>
+          <a:lstStyle/>
+          <a:p>
+            <a:r>
+              <a:rPr sz="1000">
+                <a:solidFill>
+                  <a:srgbClr val="1A1A1A"/>
+                </a:solidFill>
+                <a:latin typeface="Trenda IG Text Semibold"/>
+              </a:rPr>
+              <a:t>Decisions made on anecdote</a:t>
+            </a:r>
+          </a:p>
+        </p:txBody>
+      </p:sp>
+      <p:sp>
+        <p:nvSpPr>
+          <p:cNvPr id="52" name="TextBox 51"/>
+          <p:cNvSpPr txBox="1"/>
+          <p:nvPr/>
+        </p:nvSpPr>
+        <p:spPr>
+          <a:xfrm>
+            <a:off x="4581144" y="5038344"/>
+            <a:ext cx="3264407" cy="310896"/>
+          </a:xfrm>
+          <a:prstGeom prst="rect">
+            <a:avLst/>
+          </a:prstGeom>
+          <a:noFill/>
+        </p:spPr>
+        <p:txBody>
+          <a:bodyPr wrap="square" lIns="0" rIns="0" tIns="0" bIns="0" anchor="t">
+            <a:spAutoFit/>
+          </a:bodyPr>
+          <a:lstStyle/>
+          <a:p>
+            <a:pPr>
+              <a:lnSpc>
+                <a:spcPct val="100000"/>
+              </a:lnSpc>
+            </a:pPr>
+            <a:r>
+              <a:rPr sz="880">
+                <a:solidFill>
+                  <a:srgbClr val="5A6573"/>
+                </a:solidFill>
+                <a:latin typeface="Trenda IG Text"/>
+              </a:rPr>
+              <a:t>Where to hire, where to open, who to fix. Argued, not computed</a:t>
+            </a:r>
+          </a:p>
+        </p:txBody>
+      </p:sp>
+      <p:sp>
+        <p:nvSpPr>
+          <p:cNvPr id="53" name="Rectangle 52"/>
+          <p:cNvSpPr/>
+          <p:nvPr/>
+        </p:nvSpPr>
+        <p:spPr>
+          <a:xfrm>
+            <a:off x="8174736" y="987552"/>
+            <a:ext cx="3904487" cy="4572000"/>
+          </a:xfrm>
+          <a:prstGeom prst="rect">
+            <a:avLst/>
+          </a:prstGeom>
+          <a:solidFill>
+            <a:srgbClr val="F4F6F9"/>
+          </a:solidFill>
+          <a:ln w="9525">
+            <a:solidFill>
+              <a:srgbClr val="D5D9DE"/>
+            </a:solidFill>
+          </a:ln>
+          <a:effectLst/>
+        </p:spPr>
+        <p:style>
+          <a:lnRef idx="1">
+            <a:schemeClr val="accent1"/>
+          </a:lnRef>
+          <a:fillRef idx="3">
+            <a:schemeClr val="accent1"/>
+          </a:fillRef>
+          <a:effectRef idx="2">
+            <a:schemeClr val="accent1"/>
+          </a:effectRef>
+          <a:fontRef idx="minor">
+            <a:schemeClr val="lt1"/>
+          </a:fontRef>
+        </p:style>
+        <p:txBody>
+          <a:bodyPr rtlCol="0" anchor="ctr"/>
+          <a:lstStyle/>
+          <a:p/>
+        </p:txBody>
+      </p:sp>
+      <p:sp>
+        <p:nvSpPr>
+          <p:cNvPr id="54" name="Rectangle 53"/>
+          <p:cNvSpPr/>
+          <p:nvPr/>
+        </p:nvSpPr>
+        <p:spPr>
+          <a:xfrm>
+            <a:off x="8357615" y="1197864"/>
+            <a:ext cx="91440" cy="91440"/>
+          </a:xfrm>
+          <a:prstGeom prst="rect">
+            <a:avLst/>
+          </a:prstGeom>
+          <a:solidFill>
+            <a:srgbClr val="1B6BC0"/>
+          </a:solidFill>
+          <a:ln>
+            <a:noFill/>
+          </a:ln>
+          <a:effectLst/>
+        </p:spPr>
+        <p:style>
+          <a:lnRef idx="1">
+            <a:schemeClr val="accent1"/>
+          </a:lnRef>
+          <a:fillRef idx="3">
+            <a:schemeClr val="accent1"/>
+          </a:fillRef>
+          <a:effectRef idx="2">
+            <a:schemeClr val="accent1"/>
+          </a:effectRef>
+          <a:fontRef idx="minor">
+            <a:schemeClr val="lt1"/>
+          </a:fontRef>
+        </p:style>
+        <p:txBody>
+          <a:bodyPr rtlCol="0" anchor="ctr"/>
+          <a:lstStyle/>
+          <a:p/>
+        </p:txBody>
+      </p:sp>
+      <p:sp>
+        <p:nvSpPr>
+          <p:cNvPr id="55" name="TextBox 54"/>
+          <p:cNvSpPr txBox="1"/>
+          <p:nvPr/>
+        </p:nvSpPr>
+        <p:spPr>
+          <a:xfrm>
+            <a:off x="8540496" y="1115568"/>
+            <a:ext cx="3355847" cy="274320"/>
+          </a:xfrm>
+          <a:prstGeom prst="rect">
+            <a:avLst/>
+          </a:prstGeom>
+          <a:noFill/>
+        </p:spPr>
+        <p:txBody>
+          <a:bodyPr wrap="square" lIns="0" rIns="0" tIns="0" bIns="0" anchor="t">
+            <a:spAutoFit/>
+          </a:bodyPr>
+          <a:lstStyle/>
+          <a:p>
+            <a:r>
+              <a:rPr sz="1400">
+                <a:solidFill>
+                  <a:srgbClr val="1A1A1A"/>
+                </a:solidFill>
+                <a:latin typeface="Trenda IG Display Bold"/>
+              </a:rPr>
+              <a:t>Why the usual answers miss</a:t>
+            </a:r>
+          </a:p>
+        </p:txBody>
+      </p:sp>
+      <p:sp>
+        <p:nvSpPr>
+          <p:cNvPr id="56" name="TextBox 55"/>
+          <p:cNvSpPr txBox="1"/>
+          <p:nvPr/>
+        </p:nvSpPr>
+        <p:spPr>
+          <a:xfrm>
+            <a:off x="8357615" y="1572768"/>
+            <a:ext cx="3538727" cy="182880"/>
+          </a:xfrm>
+          <a:prstGeom prst="rect">
+            <a:avLst/>
+          </a:prstGeom>
+          <a:noFill/>
+        </p:spPr>
+        <p:txBody>
+          <a:bodyPr wrap="square" lIns="0" rIns="0" tIns="0" bIns="0" anchor="t">
+            <a:spAutoFit/>
+          </a:bodyPr>
+          <a:lstStyle/>
+          <a:p>
+            <a:r>
+              <a:rPr sz="1000">
+                <a:solidFill>
+                  <a:srgbClr val="1B6BC0"/>
+                </a:solidFill>
+                <a:latin typeface="Trenda IG Text Semibold"/>
+              </a:rPr>
+              <a:t>Another dashboard</a:t>
+            </a:r>
+          </a:p>
+        </p:txBody>
+      </p:sp>
+      <p:sp>
+        <p:nvSpPr>
+          <p:cNvPr id="57" name="TextBox 56"/>
+          <p:cNvSpPr txBox="1"/>
+          <p:nvPr/>
+        </p:nvSpPr>
+        <p:spPr>
+          <a:xfrm>
+            <a:off x="8357615" y="1764792"/>
+            <a:ext cx="3538727" cy="170688"/>
+          </a:xfrm>
+          <a:prstGeom prst="rect">
+            <a:avLst/>
+          </a:prstGeom>
+          <a:noFill/>
+        </p:spPr>
+        <p:txBody>
+          <a:bodyPr wrap="square" lIns="0" rIns="0" tIns="0" bIns="0" anchor="t">
+            <a:spAutoFit/>
+          </a:bodyPr>
+          <a:lstStyle/>
+          <a:p>
+            <a:pPr>
+              <a:lnSpc>
+                <a:spcPct val="100000"/>
+              </a:lnSpc>
+            </a:pPr>
+            <a:r>
+              <a:rPr sz="880">
+                <a:solidFill>
+                  <a:srgbClr val="5A6573"/>
+                </a:solidFill>
+                <a:latin typeface="Trenda IG Text"/>
+              </a:rPr>
+              <a:t>Counts what exists. An absence has no row to count</a:t>
+            </a:r>
+          </a:p>
+        </p:txBody>
+      </p:sp>
+      <p:sp>
+        <p:nvSpPr>
+          <p:cNvPr id="58" name="TextBox 57"/>
+          <p:cNvSpPr txBox="1"/>
+          <p:nvPr/>
+        </p:nvSpPr>
+        <p:spPr>
+          <a:xfrm>
+            <a:off x="8357615" y="2036064"/>
+            <a:ext cx="3538727" cy="182880"/>
+          </a:xfrm>
+          <a:prstGeom prst="rect">
+            <a:avLst/>
+          </a:prstGeom>
+          <a:noFill/>
+        </p:spPr>
+        <p:txBody>
+          <a:bodyPr wrap="square" lIns="0" rIns="0" tIns="0" bIns="0" anchor="t">
+            <a:spAutoFit/>
+          </a:bodyPr>
+          <a:lstStyle/>
+          <a:p>
+            <a:r>
+              <a:rPr sz="1000">
+                <a:solidFill>
+                  <a:srgbClr val="1B6BC0"/>
+                </a:solidFill>
+                <a:latin typeface="Trenda IG Text Semibold"/>
+              </a:rPr>
+              <a:t>A data warehouse</a:t>
+            </a:r>
+          </a:p>
+        </p:txBody>
+      </p:sp>
+      <p:sp>
+        <p:nvSpPr>
+          <p:cNvPr id="59" name="TextBox 58"/>
+          <p:cNvSpPr txBox="1"/>
+          <p:nvPr/>
+        </p:nvSpPr>
+        <p:spPr>
+          <a:xfrm>
+            <a:off x="8357615" y="2228088"/>
+            <a:ext cx="3538727" cy="304800"/>
+          </a:xfrm>
+          <a:prstGeom prst="rect">
+            <a:avLst/>
+          </a:prstGeom>
+          <a:noFill/>
+        </p:spPr>
+        <p:txBody>
+          <a:bodyPr wrap="square" lIns="0" rIns="0" tIns="0" bIns="0" anchor="t">
+            <a:spAutoFit/>
+          </a:bodyPr>
+          <a:lstStyle/>
+          <a:p>
+            <a:pPr>
+              <a:lnSpc>
+                <a:spcPct val="100000"/>
+              </a:lnSpc>
+            </a:pPr>
+            <a:r>
+              <a:rPr sz="880">
+                <a:solidFill>
+                  <a:srgbClr val="5A6573"/>
+                </a:solidFill>
+                <a:latin typeface="Trenda IG Text"/>
+              </a:rPr>
+              <a:t>Joins tables, not paths. It answers how many, never what is missing within thirty minutes</a:t>
+            </a:r>
+          </a:p>
+        </p:txBody>
+      </p:sp>
+      <p:sp>
+        <p:nvSpPr>
+          <p:cNvPr id="60" name="TextBox 59"/>
+          <p:cNvSpPr txBox="1"/>
+          <p:nvPr/>
+        </p:nvSpPr>
+        <p:spPr>
+          <a:xfrm>
+            <a:off x="8357615" y="2633472"/>
+            <a:ext cx="3538727" cy="182880"/>
+          </a:xfrm>
+          <a:prstGeom prst="rect">
+            <a:avLst/>
+          </a:prstGeom>
+          <a:noFill/>
+        </p:spPr>
+        <p:txBody>
+          <a:bodyPr wrap="square" lIns="0" rIns="0" tIns="0" bIns="0" anchor="t">
+            <a:spAutoFit/>
+          </a:bodyPr>
+          <a:lstStyle/>
+          <a:p>
+            <a:r>
+              <a:rPr sz="1000">
+                <a:solidFill>
+                  <a:srgbClr val="1B6BC0"/>
+                </a:solidFill>
+                <a:latin typeface="Trenda IG Text Semibold"/>
+              </a:rPr>
+              <a:t>A consulting study</a:t>
+            </a:r>
+          </a:p>
+        </p:txBody>
+      </p:sp>
+      <p:sp>
+        <p:nvSpPr>
+          <p:cNvPr id="61" name="TextBox 60"/>
+          <p:cNvSpPr txBox="1"/>
+          <p:nvPr/>
+        </p:nvSpPr>
+        <p:spPr>
+          <a:xfrm>
+            <a:off x="8357615" y="2825496"/>
+            <a:ext cx="3538727" cy="170688"/>
+          </a:xfrm>
+          <a:prstGeom prst="rect">
+            <a:avLst/>
+          </a:prstGeom>
+          <a:noFill/>
+        </p:spPr>
+        <p:txBody>
+          <a:bodyPr wrap="square" lIns="0" rIns="0" tIns="0" bIns="0" anchor="t">
+            <a:spAutoFit/>
+          </a:bodyPr>
+          <a:lstStyle/>
+          <a:p>
+            <a:pPr>
+              <a:lnSpc>
+                <a:spcPct val="100000"/>
+              </a:lnSpc>
+            </a:pPr>
+            <a:r>
+              <a:rPr sz="880">
+                <a:solidFill>
+                  <a:srgbClr val="5A6573"/>
+                </a:solidFill>
+                <a:latin typeface="Trenda IG Text"/>
+              </a:rPr>
+              <a:t>True the day it lands, stale a quarter later, and not repeatable</a:t>
+            </a:r>
+          </a:p>
+        </p:txBody>
+      </p:sp>
+      <p:sp>
+        <p:nvSpPr>
+          <p:cNvPr id="62" name="TextBox 61"/>
+          <p:cNvSpPr txBox="1"/>
+          <p:nvPr/>
+        </p:nvSpPr>
+        <p:spPr>
+          <a:xfrm>
+            <a:off x="8357615" y="3096768"/>
+            <a:ext cx="3538727" cy="182880"/>
+          </a:xfrm>
+          <a:prstGeom prst="rect">
+            <a:avLst/>
+          </a:prstGeom>
+          <a:noFill/>
+        </p:spPr>
+        <p:txBody>
+          <a:bodyPr wrap="square" lIns="0" rIns="0" tIns="0" bIns="0" anchor="t">
+            <a:spAutoFit/>
+          </a:bodyPr>
+          <a:lstStyle/>
+          <a:p>
+            <a:r>
+              <a:rPr sz="1000">
+                <a:solidFill>
+                  <a:srgbClr val="1B6BC0"/>
+                </a:solidFill>
+                <a:latin typeface="Trenda IG Text Semibold"/>
+              </a:rPr>
+              <a:t>A chatbot over documents</a:t>
+            </a:r>
+          </a:p>
+        </p:txBody>
+      </p:sp>
+      <p:sp>
+        <p:nvSpPr>
+          <p:cNvPr id="63" name="TextBox 62"/>
+          <p:cNvSpPr txBox="1"/>
+          <p:nvPr/>
+        </p:nvSpPr>
+        <p:spPr>
+          <a:xfrm>
+            <a:off x="8357615" y="3288792"/>
+            <a:ext cx="3538727" cy="170688"/>
+          </a:xfrm>
+          <a:prstGeom prst="rect">
+            <a:avLst/>
+          </a:prstGeom>
+          <a:noFill/>
+        </p:spPr>
+        <p:txBody>
+          <a:bodyPr wrap="square" lIns="0" rIns="0" tIns="0" bIns="0" anchor="t">
+            <a:spAutoFit/>
+          </a:bodyPr>
+          <a:lstStyle/>
+          <a:p>
+            <a:pPr>
+              <a:lnSpc>
+                <a:spcPct val="100000"/>
+              </a:lnSpc>
+            </a:pPr>
+            <a:r>
+              <a:rPr sz="880">
+                <a:solidFill>
+                  <a:srgbClr val="5A6573"/>
+                </a:solidFill>
+                <a:latin typeface="Trenda IG Text"/>
+              </a:rPr>
+              <a:t>Fluent, ungrounded, and impossible to audit</a:t>
+            </a:r>
+          </a:p>
+        </p:txBody>
+      </p:sp>
+      <p:sp>
+        <p:nvSpPr>
+          <p:cNvPr id="64" name="Rectangle 63"/>
+          <p:cNvSpPr/>
+          <p:nvPr/>
+        </p:nvSpPr>
+        <p:spPr>
+          <a:xfrm>
+            <a:off x="8357615" y="3310128"/>
+            <a:ext cx="3538727" cy="2103120"/>
+          </a:xfrm>
+          <a:prstGeom prst="rect">
+            <a:avLst/>
+          </a:prstGeom>
+          <a:solidFill>
+            <a:srgbClr val="0E1B2E"/>
+          </a:solidFill>
+          <a:ln>
+            <a:noFill/>
+          </a:ln>
+          <a:effectLst/>
+        </p:spPr>
+        <p:style>
+          <a:lnRef idx="1">
+            <a:schemeClr val="accent1"/>
+          </a:lnRef>
+          <a:fillRef idx="3">
+            <a:schemeClr val="accent1"/>
+          </a:fillRef>
+          <a:effectRef idx="2">
+            <a:schemeClr val="accent1"/>
+          </a:effectRef>
+          <a:fontRef idx="minor">
+            <a:schemeClr val="lt1"/>
+          </a:fontRef>
+        </p:style>
+        <p:txBody>
+          <a:bodyPr rtlCol="0" anchor="ctr"/>
+          <a:lstStyle/>
+          <a:p/>
+        </p:txBody>
+      </p:sp>
+      <p:sp>
+        <p:nvSpPr>
+          <p:cNvPr id="65" name="Rectangle 64"/>
+          <p:cNvSpPr/>
+          <p:nvPr/>
+        </p:nvSpPr>
+        <p:spPr>
+          <a:xfrm>
+            <a:off x="8503919" y="3511296"/>
+            <a:ext cx="82296" cy="82296"/>
+          </a:xfrm>
+          <a:prstGeom prst="rect">
+            <a:avLst/>
+          </a:prstGeom>
+          <a:solidFill>
+            <a:srgbClr val="5FD0C0"/>
+          </a:solidFill>
+          <a:ln>
+            <a:noFill/>
+          </a:ln>
+          <a:effectLst/>
+        </p:spPr>
+        <p:style>
+          <a:lnRef idx="1">
+            <a:schemeClr val="accent1"/>
+          </a:lnRef>
+          <a:fillRef idx="3">
+            <a:schemeClr val="accent1"/>
+          </a:fillRef>
+          <a:effectRef idx="2">
+            <a:schemeClr val="accent1"/>
+          </a:effectRef>
+          <a:fontRef idx="minor">
+            <a:schemeClr val="lt1"/>
+          </a:fontRef>
+        </p:style>
+        <p:txBody>
+          <a:bodyPr rtlCol="0" anchor="ctr"/>
+          <a:lstStyle/>
+          <a:p/>
+        </p:txBody>
+      </p:sp>
+      <p:sp>
+        <p:nvSpPr>
+          <p:cNvPr id="66" name="TextBox 65"/>
+          <p:cNvSpPr txBox="1"/>
+          <p:nvPr/>
+        </p:nvSpPr>
+        <p:spPr>
+          <a:xfrm>
+            <a:off x="8668512" y="3438144"/>
+            <a:ext cx="3264407" cy="237744"/>
+          </a:xfrm>
+          <a:prstGeom prst="rect">
+            <a:avLst/>
+          </a:prstGeom>
+          <a:noFill/>
+        </p:spPr>
+        <p:txBody>
+          <a:bodyPr wrap="square" lIns="0" rIns="0" tIns="0" bIns="0" anchor="t">
+            <a:spAutoFit/>
+          </a:bodyPr>
+          <a:lstStyle/>
+          <a:p>
+            <a:r>
+              <a:rPr sz="1250">
+                <a:solidFill>
+                  <a:srgbClr val="FFFFFF"/>
+                </a:solidFill>
+                <a:latin typeface="Trenda IG Display Bold"/>
+              </a:rPr>
+              <a:t>What we do instead</a:t>
+            </a:r>
+          </a:p>
+        </p:txBody>
+      </p:sp>
+      <p:sp>
+        <p:nvSpPr>
+          <p:cNvPr id="67" name="TextBox 66"/>
+          <p:cNvSpPr txBox="1"/>
+          <p:nvPr/>
+        </p:nvSpPr>
+        <p:spPr>
+          <a:xfrm>
+            <a:off x="8503919" y="3785615"/>
+            <a:ext cx="109728" cy="173736"/>
+          </a:xfrm>
+          <a:prstGeom prst="rect">
+            <a:avLst/>
+          </a:prstGeom>
+          <a:noFill/>
+        </p:spPr>
+        <p:txBody>
+          <a:bodyPr wrap="square" lIns="0" rIns="0" tIns="0" bIns="0" anchor="t">
+            <a:spAutoFit/>
+          </a:bodyPr>
+          <a:lstStyle/>
+          <a:p>
+            <a:r>
+              <a:rPr sz="900">
+                <a:solidFill>
+                  <a:srgbClr val="D8DEE6"/>
+                </a:solidFill>
+                <a:latin typeface="Trenda IG Text"/>
+              </a:rPr>
+              <a:t>•</a:t>
+            </a:r>
+          </a:p>
+        </p:txBody>
+      </p:sp>
+      <p:sp>
+        <p:nvSpPr>
+          <p:cNvPr id="68" name="TextBox 67"/>
+          <p:cNvSpPr txBox="1"/>
+          <p:nvPr/>
+        </p:nvSpPr>
+        <p:spPr>
+          <a:xfrm>
+            <a:off x="8604503" y="3785615"/>
+            <a:ext cx="3200399" cy="310896"/>
+          </a:xfrm>
+          <a:prstGeom prst="rect">
+            <a:avLst/>
+          </a:prstGeom>
+          <a:noFill/>
+        </p:spPr>
+        <p:txBody>
+          <a:bodyPr wrap="square" lIns="0" rIns="0" tIns="0" bIns="0" anchor="t">
+            <a:spAutoFit/>
+          </a:bodyPr>
+          <a:lstStyle/>
+          <a:p>
+            <a:pPr>
+              <a:lnSpc>
+                <a:spcPct val="100000"/>
+              </a:lnSpc>
+            </a:pPr>
+            <a:r>
+              <a:rPr sz="900">
+                <a:solidFill>
+                  <a:srgbClr val="D8DEE6"/>
+                </a:solidFill>
+                <a:latin typeface="Trenda IG Text"/>
+              </a:rPr>
+              <a:t>Connect demand, supply, capability and reachability as one graph</a:t>
+            </a:r>
+          </a:p>
+        </p:txBody>
+      </p:sp>
+      <p:sp>
+        <p:nvSpPr>
+          <p:cNvPr id="69" name="TextBox 68"/>
+          <p:cNvSpPr txBox="1"/>
+          <p:nvPr/>
+        </p:nvSpPr>
+        <p:spPr>
+          <a:xfrm>
+            <a:off x="8503919" y="4148835"/>
+            <a:ext cx="109728" cy="173736"/>
+          </a:xfrm>
+          <a:prstGeom prst="rect">
+            <a:avLst/>
+          </a:prstGeom>
+          <a:noFill/>
+        </p:spPr>
+        <p:txBody>
+          <a:bodyPr wrap="square" lIns="0" rIns="0" tIns="0" bIns="0" anchor="t">
+            <a:spAutoFit/>
+          </a:bodyPr>
+          <a:lstStyle/>
+          <a:p>
+            <a:r>
+              <a:rPr sz="900">
+                <a:solidFill>
+                  <a:srgbClr val="D8DEE6"/>
+                </a:solidFill>
+                <a:latin typeface="Trenda IG Text"/>
+              </a:rPr>
+              <a:t>•</a:t>
+            </a:r>
+          </a:p>
+        </p:txBody>
+      </p:sp>
+      <p:sp>
+        <p:nvSpPr>
+          <p:cNvPr id="70" name="TextBox 69"/>
+          <p:cNvSpPr txBox="1"/>
+          <p:nvPr/>
+        </p:nvSpPr>
+        <p:spPr>
+          <a:xfrm>
+            <a:off x="8604503" y="4148835"/>
+            <a:ext cx="3200399" cy="310896"/>
+          </a:xfrm>
+          <a:prstGeom prst="rect">
+            <a:avLst/>
+          </a:prstGeom>
+          <a:noFill/>
+        </p:spPr>
+        <p:txBody>
+          <a:bodyPr wrap="square" lIns="0" rIns="0" tIns="0" bIns="0" anchor="t">
+            <a:spAutoFit/>
+          </a:bodyPr>
+          <a:lstStyle/>
+          <a:p>
+            <a:pPr>
+              <a:lnSpc>
+                <a:spcPct val="100000"/>
+              </a:lnSpc>
+            </a:pPr>
+            <a:r>
+              <a:rPr sz="900">
+                <a:solidFill>
+                  <a:srgbClr val="D8DEE6"/>
+                </a:solidFill>
+                <a:latin typeface="Trenda IG Text"/>
+              </a:rPr>
+              <a:t>Make every offering declare what it requires, so a gap is computed rather than argued</a:t>
+            </a:r>
+          </a:p>
+        </p:txBody>
+      </p:sp>
+      <p:sp>
+        <p:nvSpPr>
+          <p:cNvPr id="71" name="TextBox 70"/>
+          <p:cNvSpPr txBox="1"/>
+          <p:nvPr/>
+        </p:nvSpPr>
+        <p:spPr>
+          <a:xfrm>
+            <a:off x="8503919" y="4512056"/>
+            <a:ext cx="109728" cy="173736"/>
+          </a:xfrm>
+          <a:prstGeom prst="rect">
+            <a:avLst/>
+          </a:prstGeom>
+          <a:noFill/>
+        </p:spPr>
+        <p:txBody>
+          <a:bodyPr wrap="square" lIns="0" rIns="0" tIns="0" bIns="0" anchor="t">
+            <a:spAutoFit/>
+          </a:bodyPr>
+          <a:lstStyle/>
+          <a:p>
+            <a:r>
+              <a:rPr sz="900">
+                <a:solidFill>
+                  <a:srgbClr val="D8DEE6"/>
+                </a:solidFill>
+                <a:latin typeface="Trenda IG Text"/>
+              </a:rPr>
+              <a:t>•</a:t>
+            </a:r>
+          </a:p>
+        </p:txBody>
+      </p:sp>
+      <p:sp>
+        <p:nvSpPr>
+          <p:cNvPr id="72" name="TextBox 71"/>
+          <p:cNvSpPr txBox="1"/>
+          <p:nvPr/>
+        </p:nvSpPr>
+        <p:spPr>
+          <a:xfrm>
+            <a:off x="8604503" y="4512056"/>
+            <a:ext cx="3200399" cy="310896"/>
+          </a:xfrm>
+          <a:prstGeom prst="rect">
+            <a:avLst/>
+          </a:prstGeom>
+          <a:noFill/>
+        </p:spPr>
+        <p:txBody>
+          <a:bodyPr wrap="square" lIns="0" rIns="0" tIns="0" bIns="0" anchor="t">
+            <a:spAutoFit/>
+          </a:bodyPr>
+          <a:lstStyle/>
+          <a:p>
+            <a:pPr>
+              <a:lnSpc>
+                <a:spcPct val="100000"/>
+              </a:lnSpc>
+            </a:pPr>
+            <a:r>
+              <a:rPr sz="900">
+                <a:solidFill>
+                  <a:srgbClr val="D8DEE6"/>
+                </a:solidFill>
+                <a:latin typeface="Trenda IG Text"/>
+              </a:rPr>
+              <a:t>Return the missing path with its evidence, so it survives the meeting it is shown in</a:t>
+            </a:r>
+          </a:p>
+        </p:txBody>
+      </p:sp>
+      <p:sp>
+        <p:nvSpPr>
+          <p:cNvPr id="73" name="TextBox 72"/>
+          <p:cNvSpPr txBox="1"/>
+          <p:nvPr/>
+        </p:nvSpPr>
+        <p:spPr>
+          <a:xfrm>
+            <a:off x="8503919" y="4875275"/>
+            <a:ext cx="109728" cy="173736"/>
+          </a:xfrm>
+          <a:prstGeom prst="rect">
+            <a:avLst/>
+          </a:prstGeom>
+          <a:noFill/>
+        </p:spPr>
+        <p:txBody>
+          <a:bodyPr wrap="square" lIns="0" rIns="0" tIns="0" bIns="0" anchor="t">
+            <a:spAutoFit/>
+          </a:bodyPr>
+          <a:lstStyle/>
+          <a:p>
+            <a:r>
+              <a:rPr sz="900">
+                <a:solidFill>
+                  <a:srgbClr val="D8DEE6"/>
+                </a:solidFill>
+                <a:latin typeface="Trenda IG Text"/>
+              </a:rPr>
+              <a:t>•</a:t>
+            </a:r>
+          </a:p>
+        </p:txBody>
+      </p:sp>
+      <p:sp>
+        <p:nvSpPr>
+          <p:cNvPr id="74" name="TextBox 73"/>
+          <p:cNvSpPr txBox="1"/>
+          <p:nvPr/>
+        </p:nvSpPr>
+        <p:spPr>
+          <a:xfrm>
+            <a:off x="8604503" y="4875275"/>
+            <a:ext cx="3200399" cy="310896"/>
+          </a:xfrm>
+          <a:prstGeom prst="rect">
+            <a:avLst/>
+          </a:prstGeom>
+          <a:noFill/>
+        </p:spPr>
+        <p:txBody>
+          <a:bodyPr wrap="square" lIns="0" rIns="0" tIns="0" bIns="0" anchor="t">
+            <a:spAutoFit/>
+          </a:bodyPr>
+          <a:lstStyle/>
+          <a:p>
+            <a:pPr>
+              <a:lnSpc>
+                <a:spcPct val="100000"/>
+              </a:lnSpc>
+            </a:pPr>
+            <a:r>
+              <a:rPr sz="900">
+                <a:solidFill>
+                  <a:srgbClr val="D8DEE6"/>
+                </a:solidFill>
+                <a:latin typeface="Trenda IG Text"/>
+              </a:rPr>
+              <a:t>Re-run it every period, and simulate the fix before anyone spends</a:t>
+            </a:r>
+          </a:p>
+        </p:txBody>
+      </p:sp>
+      <p:sp>
+        <p:nvSpPr>
+          <p:cNvPr id="75" name="Rectangle 74"/>
+          <p:cNvSpPr/>
+          <p:nvPr/>
+        </p:nvSpPr>
+        <p:spPr>
+          <a:xfrm>
+            <a:off x="109728" y="5687568"/>
+            <a:ext cx="11972544" cy="566928"/>
+          </a:xfrm>
+          <a:prstGeom prst="rect">
+            <a:avLst/>
+          </a:prstGeom>
+          <a:solidFill>
+            <a:srgbClr val="0E1B2E"/>
+          </a:solidFill>
+          <a:ln>
+            <a:noFill/>
+          </a:ln>
+          <a:effectLst/>
+        </p:spPr>
+        <p:style>
+          <a:lnRef idx="1">
+            <a:schemeClr val="accent1"/>
+          </a:lnRef>
+          <a:fillRef idx="3">
+            <a:schemeClr val="accent1"/>
+          </a:fillRef>
+          <a:effectRef idx="2">
+            <a:schemeClr val="accent1"/>
+          </a:effectRef>
+          <a:fontRef idx="minor">
+            <a:schemeClr val="lt1"/>
+          </a:fontRef>
+        </p:style>
+        <p:txBody>
+          <a:bodyPr rtlCol="0" anchor="ctr"/>
+          <a:lstStyle/>
+          <a:p/>
+        </p:txBody>
+      </p:sp>
+      <p:sp>
+        <p:nvSpPr>
+          <p:cNvPr id="76" name="Rectangle 75"/>
+          <p:cNvSpPr/>
+          <p:nvPr/>
+        </p:nvSpPr>
+        <p:spPr>
+          <a:xfrm>
+            <a:off x="292608" y="5879592"/>
+            <a:ext cx="91440" cy="91440"/>
+          </a:xfrm>
+          <a:prstGeom prst="rect">
+            <a:avLst/>
+          </a:prstGeom>
+          <a:solidFill>
+            <a:srgbClr val="5FD0C0"/>
+          </a:solidFill>
+          <a:ln>
+            <a:noFill/>
+          </a:ln>
+          <a:effectLst/>
+        </p:spPr>
+        <p:style>
+          <a:lnRef idx="1">
+            <a:schemeClr val="accent1"/>
+          </a:lnRef>
+          <a:fillRef idx="3">
+            <a:schemeClr val="accent1"/>
+          </a:fillRef>
+          <a:effectRef idx="2">
+            <a:schemeClr val="accent1"/>
+          </a:effectRef>
+          <a:fontRef idx="minor">
+            <a:schemeClr val="lt1"/>
+          </a:fontRef>
+        </p:style>
+        <p:txBody>
+          <a:bodyPr rtlCol="0" anchor="ctr"/>
+          <a:lstStyle/>
+          <a:p/>
+        </p:txBody>
+      </p:sp>
+      <p:sp>
+        <p:nvSpPr>
+          <p:cNvPr id="77" name="TextBox 76"/>
+          <p:cNvSpPr txBox="1"/>
+          <p:nvPr/>
+        </p:nvSpPr>
+        <p:spPr>
+          <a:xfrm>
+            <a:off x="493776" y="5687568"/>
+            <a:ext cx="11430000" cy="566928"/>
+          </a:xfrm>
+          <a:prstGeom prst="rect">
+            <a:avLst/>
+          </a:prstGeom>
+          <a:noFill/>
+        </p:spPr>
+        <p:txBody>
+          <a:bodyPr wrap="square" lIns="0" rIns="0" tIns="0" bIns="0" anchor="ctr">
+            <a:spAutoFit/>
+          </a:bodyPr>
+          <a:lstStyle/>
+          <a:p>
+            <a:r>
+              <a:rPr sz="1100">
+                <a:solidFill>
+                  <a:srgbClr val="FFFFFF"/>
+                </a:solidFill>
+                <a:latin typeface="Trenda IG Text"/>
+              </a:rPr>
+              <a:t>Everything after this slide is one idea: make the absence computable, and make the answer provable.</a:t>
             </a:r>
           </a:p>
         </p:txBody>
